--- a/presentations/La_Minute_Copilot_PromptsAvances.pptx
+++ b/presentations/La_Minute_Copilot_PromptsAvances.pptx
@@ -3859,7 +3859,7 @@
     <p:bg>
       <p:bgPr>
         <a:solidFill>
-          <a:srgbClr val="0078D4"/>
+          <a:srgbClr val="E6F0EA"/>
         </a:solidFill>
         <a:effectLst/>
       </p:bgPr>
@@ -3873,37 +3873,45 @@
       <p:grpSpPr/>
       <p:sp>
         <p:nvSpPr>
-          <p:cNvPr id="2" name="TextBox 1"/>
-          <p:cNvSpPr txBox="1"/>
+          <p:cNvPr id="2" name="Rectangle 1"/>
+          <p:cNvSpPr/>
           <p:nvPr/>
         </p:nvSpPr>
         <p:spPr>
           <a:xfrm>
-            <a:off x="914400" y="1828800"/>
-            <a:ext cx="10058400" cy="1097280"/>
-          </a:xfrm>
-          <a:prstGeom prst="rect">
-            <a:avLst/>
-          </a:prstGeom>
-          <a:noFill/>
-        </p:spPr>
-        <p:txBody>
-          <a:bodyPr wrap="square">
-            <a:spAutoFit/>
-          </a:bodyPr>
-          <a:lstStyle/>
-          <a:p>
-            <a:pPr algn="ctr">
-              <a:defRPr sz="4800" b="1">
-                <a:solidFill>
-                  <a:srgbClr val="FFFFFF"/>
-                </a:solidFill>
-                <a:latin typeface="Calibri"/>
-              </a:defRPr>
-            </a:pPr>
-            <a:r>
-              <a:t>🤖 La minute Copilot</a:t>
-            </a:r>
+            <a:off x="0" y="0"/>
+            <a:ext cx="6766560" cy="6858000"/>
+          </a:xfrm>
+          <a:prstGeom prst="rect">
+            <a:avLst/>
+          </a:prstGeom>
+          <a:solidFill>
+            <a:srgbClr val="00874E"/>
+          </a:solidFill>
+          <a:ln>
+            <a:noFill/>
+          </a:ln>
+          <a:effectLst/>
+        </p:spPr>
+        <p:style>
+          <a:lnRef idx="1">
+            <a:schemeClr val="accent1"/>
+          </a:lnRef>
+          <a:fillRef idx="3">
+            <a:schemeClr val="accent1"/>
+          </a:fillRef>
+          <a:effectRef idx="2">
+            <a:schemeClr val="accent1"/>
+          </a:effectRef>
+          <a:fontRef idx="minor">
+            <a:schemeClr val="lt1"/>
+          </a:fontRef>
+        </p:style>
+        <p:txBody>
+          <a:bodyPr rtlCol="0" anchor="ctr"/>
+          <a:lstStyle/>
+          <a:p>
+            <a:pPr algn="ctr"/>
           </a:p>
         </p:txBody>
       </p:sp>
@@ -3915,8 +3923,8 @@
         </p:nvSpPr>
         <p:spPr>
           <a:xfrm>
-            <a:off x="914400" y="2926080"/>
-            <a:ext cx="10058400" cy="731520"/>
+            <a:off x="640080" y="1828800"/>
+            <a:ext cx="5669280" cy="1463040"/>
           </a:xfrm>
           <a:prstGeom prst="rect">
             <a:avLst/>
@@ -3924,35 +3932,79 @@
           <a:noFill/>
         </p:spPr>
         <p:txBody>
-          <a:bodyPr wrap="square">
+          <a:bodyPr wrap="square" lIns="45720" rIns="45720" tIns="18288" bIns="18288">
             <a:spAutoFit/>
           </a:bodyPr>
           <a:lstStyle/>
           <a:p>
-            <a:pPr algn="ctr">
-              <a:defRPr sz="2800" b="0">
-                <a:solidFill>
-                  <a:srgbClr val="AAD4F0"/>
-                </a:solidFill>
-                <a:latin typeface="Calibri"/>
-              </a:defRPr>
-            </a:pPr>
-            <a:r>
-              <a:t>🧠 Prompts avancés: CoT, ToT, Red/Blue Team</a:t>
-            </a:r>
-          </a:p>
-        </p:txBody>
-      </p:sp>
-      <p:sp>
-        <p:nvSpPr>
-          <p:cNvPr id="4" name="TextBox 3"/>
+            <a:pPr algn="l">
+              <a:defRPr sz="4400" b="1">
+                <a:solidFill>
+                  <a:srgbClr val="FFFFFF"/>
+                </a:solidFill>
+                <a:latin typeface="Calibri"/>
+              </a:defRPr>
+            </a:pPr>
+            <a:r>
+              <a:t>La minute Copilot</a:t>
+            </a:r>
+          </a:p>
+        </p:txBody>
+      </p:sp>
+      <p:sp>
+        <p:nvSpPr>
+          <p:cNvPr id="4" name="Rectangle 3"/>
+          <p:cNvSpPr/>
+          <p:nvPr/>
+        </p:nvSpPr>
+        <p:spPr>
+          <a:xfrm>
+            <a:off x="640080" y="3246120"/>
+            <a:ext cx="2926080" cy="36576"/>
+          </a:xfrm>
+          <a:prstGeom prst="rect">
+            <a:avLst/>
+          </a:prstGeom>
+          <a:solidFill>
+            <a:srgbClr val="FFFFFF"/>
+          </a:solidFill>
+          <a:ln>
+            <a:noFill/>
+          </a:ln>
+          <a:effectLst/>
+        </p:spPr>
+        <p:style>
+          <a:lnRef idx="1">
+            <a:schemeClr val="accent1"/>
+          </a:lnRef>
+          <a:fillRef idx="3">
+            <a:schemeClr val="accent1"/>
+          </a:fillRef>
+          <a:effectRef idx="2">
+            <a:schemeClr val="accent1"/>
+          </a:effectRef>
+          <a:fontRef idx="minor">
+            <a:schemeClr val="lt1"/>
+          </a:fontRef>
+        </p:style>
+        <p:txBody>
+          <a:bodyPr rtlCol="0" anchor="ctr"/>
+          <a:lstStyle/>
+          <a:p>
+            <a:pPr algn="ctr"/>
+          </a:p>
+        </p:txBody>
+      </p:sp>
+      <p:sp>
+        <p:nvSpPr>
+          <p:cNvPr id="5" name="TextBox 4"/>
           <p:cNvSpPr txBox="1"/>
           <p:nvPr/>
         </p:nvSpPr>
         <p:spPr>
           <a:xfrm>
-            <a:off x="914400" y="4114800"/>
-            <a:ext cx="10058400" cy="548640"/>
+            <a:off x="640080" y="3429000"/>
+            <a:ext cx="5669280" cy="640080"/>
           </a:xfrm>
           <a:prstGeom prst="rect">
             <a:avLst/>
@@ -3960,21 +4012,129 @@
           <a:noFill/>
         </p:spPr>
         <p:txBody>
-          <a:bodyPr wrap="square">
+          <a:bodyPr wrap="square" lIns="45720" rIns="45720" tIns="18288" bIns="18288">
             <a:spAutoFit/>
           </a:bodyPr>
           <a:lstStyle/>
           <a:p>
-            <a:pPr algn="ctr">
-              <a:defRPr sz="1600" b="0">
-                <a:solidFill>
-                  <a:srgbClr val="AAD4F0"/>
+            <a:pPr algn="l">
+              <a:defRPr sz="2200" b="0">
+                <a:solidFill>
+                  <a:srgbClr val="FFFFFF"/>
+                </a:solidFill>
+                <a:latin typeface="Calibri"/>
+              </a:defRPr>
+            </a:pPr>
+            <a:r>
+              <a:t>Prompts avancés: CoT, ToT, Red/Blue Team</a:t>
+            </a:r>
+          </a:p>
+        </p:txBody>
+      </p:sp>
+      <p:sp>
+        <p:nvSpPr>
+          <p:cNvPr id="6" name="TextBox 5"/>
+          <p:cNvSpPr txBox="1"/>
+          <p:nvPr/>
+        </p:nvSpPr>
+        <p:spPr>
+          <a:xfrm>
+            <a:off x="640080" y="4572000"/>
+            <a:ext cx="5669280" cy="365760"/>
+          </a:xfrm>
+          <a:prstGeom prst="rect">
+            <a:avLst/>
+          </a:prstGeom>
+          <a:noFill/>
+        </p:spPr>
+        <p:txBody>
+          <a:bodyPr wrap="square" lIns="45720" rIns="45720" tIns="18288" bIns="18288">
+            <a:spAutoFit/>
+          </a:bodyPr>
+          <a:lstStyle/>
+          <a:p>
+            <a:pPr algn="l">
+              <a:defRPr sz="1300" b="0">
+                <a:solidFill>
+                  <a:srgbClr val="CCE0D2"/>
                 </a:solidFill>
                 <a:latin typeface="Calibri"/>
               </a:defRPr>
             </a:pPr>
             <a:r>
               <a:t>Des techniques de prompt qui font réfléchir Copilot... littéralement</a:t>
+            </a:r>
+          </a:p>
+        </p:txBody>
+      </p:sp>
+      <p:sp>
+        <p:nvSpPr>
+          <p:cNvPr id="7" name="TextBox 6"/>
+          <p:cNvSpPr txBox="1"/>
+          <p:nvPr/>
+        </p:nvSpPr>
+        <p:spPr>
+          <a:xfrm>
+            <a:off x="640080" y="5029200"/>
+            <a:ext cx="5669280" cy="320040"/>
+          </a:xfrm>
+          <a:prstGeom prst="rect">
+            <a:avLst/>
+          </a:prstGeom>
+          <a:noFill/>
+        </p:spPr>
+        <p:txBody>
+          <a:bodyPr wrap="square" lIns="45720" rIns="45720" tIns="18288" bIns="18288">
+            <a:spAutoFit/>
+          </a:bodyPr>
+          <a:lstStyle/>
+          <a:p>
+            <a:pPr algn="l">
+              <a:defRPr sz="1300" b="1">
+                <a:solidFill>
+                  <a:srgbClr val="FFFFFF"/>
+                </a:solidFill>
+                <a:latin typeface="Calibri"/>
+              </a:defRPr>
+            </a:pPr>
+            <a:r>
+              <a:t>Martin Fournier</a:t>
+            </a:r>
+          </a:p>
+        </p:txBody>
+      </p:sp>
+      <p:sp>
+        <p:nvSpPr>
+          <p:cNvPr id="8" name="TextBox 7"/>
+          <p:cNvSpPr txBox="1"/>
+          <p:nvPr/>
+        </p:nvSpPr>
+        <p:spPr>
+          <a:xfrm>
+            <a:off x="640080" y="5349240"/>
+            <a:ext cx="5669280" cy="274320"/>
+          </a:xfrm>
+          <a:prstGeom prst="rect">
+            <a:avLst/>
+          </a:prstGeom>
+          <a:noFill/>
+        </p:spPr>
+        <p:txBody>
+          <a:bodyPr wrap="square" lIns="45720" rIns="45720" tIns="18288" bIns="18288">
+            <a:spAutoFit/>
+          </a:bodyPr>
+          <a:lstStyle/>
+          <a:p>
+            <a:pPr algn="l">
+              <a:defRPr sz="1200" b="0">
+                <a:solidFill>
+                  <a:srgbClr val="CCE0D2"/>
+                </a:solidFill>
+                <a:latin typeface="Calibri"/>
+              </a:defRPr>
+            </a:pPr>
+            <a:r>
+              <a:t>2026-05-17</a:t>
             </a:r>
           </a:p>
         </p:txBody>
@@ -3993,7 +4153,7 @@
     <p:bg>
       <p:bgPr>
         <a:solidFill>
-          <a:srgbClr val="FFFFFF"/>
+          <a:srgbClr val="E6F0EA"/>
         </a:solidFill>
         <a:effectLst/>
       </p:bgPr>
@@ -4013,8 +4173,8 @@
         </p:nvSpPr>
         <p:spPr>
           <a:xfrm>
-            <a:off x="457200" y="274320"/>
-            <a:ext cx="10972800" cy="640080"/>
+            <a:off x="457200" y="365760"/>
+            <a:ext cx="10972800" cy="731520"/>
           </a:xfrm>
           <a:prstGeom prst="rect">
             <a:avLst/>
@@ -4022,21 +4182,21 @@
           <a:noFill/>
         </p:spPr>
         <p:txBody>
-          <a:bodyPr wrap="square">
+          <a:bodyPr wrap="square" lIns="45720" rIns="45720" tIns="18288" bIns="18288">
             <a:spAutoFit/>
           </a:bodyPr>
           <a:lstStyle/>
           <a:p>
             <a:pPr algn="l">
-              <a:defRPr sz="3200" b="1">
-                <a:solidFill>
-                  <a:srgbClr val="2B2B2B"/>
-                </a:solidFill>
-                <a:latin typeface="Calibri"/>
-              </a:defRPr>
-            </a:pPr>
-            <a:r>
-              <a:t>🧠 Chain of Thought (CoT) — Penser étape par étape</a:t>
+              <a:defRPr sz="2800" b="1">
+                <a:solidFill>
+                  <a:srgbClr val="006B3F"/>
+                </a:solidFill>
+                <a:latin typeface="Calibri"/>
+              </a:defRPr>
+            </a:pPr>
+            <a:r>
+              <a:t>Chain of Thought (CoT) — Penser étape par étape</a:t>
             </a:r>
           </a:p>
         </p:txBody>
@@ -4049,8 +4209,8 @@
         </p:nvSpPr>
         <p:spPr>
           <a:xfrm>
-            <a:off x="457200" y="914400"/>
-            <a:ext cx="10972800" cy="457200"/>
+            <a:off x="457200" y="1005840"/>
+            <a:ext cx="10972800" cy="411480"/>
           </a:xfrm>
           <a:prstGeom prst="rect">
             <a:avLst/>
@@ -4058,13 +4218,13 @@
           <a:noFill/>
         </p:spPr>
         <p:txBody>
-          <a:bodyPr wrap="square">
+          <a:bodyPr wrap="square" lIns="45720" rIns="45720" tIns="18288" bIns="18288">
             <a:spAutoFit/>
           </a:bodyPr>
           <a:lstStyle/>
           <a:p>
             <a:pPr algn="l">
-              <a:defRPr sz="1800" b="0">
+              <a:defRPr sz="1500" b="0">
                 <a:solidFill>
                   <a:srgbClr val="6B6B6B"/>
                 </a:solidFill>
@@ -4079,97 +4239,25 @@
       </p:sp>
       <p:sp>
         <p:nvSpPr>
-          <p:cNvPr id="4" name="TextBox 3"/>
-          <p:cNvSpPr txBox="1"/>
-          <p:nvPr/>
-        </p:nvSpPr>
-        <p:spPr>
-          <a:xfrm>
-            <a:off x="457200" y="1554480"/>
-            <a:ext cx="10972800" cy="1371600"/>
-          </a:xfrm>
-          <a:prstGeom prst="rect">
-            <a:avLst/>
-          </a:prstGeom>
-          <a:noFill/>
-        </p:spPr>
-        <p:txBody>
-          <a:bodyPr wrap="square">
-            <a:spAutoFit/>
-          </a:bodyPr>
-          <a:lstStyle/>
-          <a:p>
-            <a:pPr>
-              <a:spcAft>
-                <a:spcPts val="400"/>
-              </a:spcAft>
-              <a:defRPr sz="1400">
-                <a:solidFill>
-                  <a:srgbClr val="2B2B2B"/>
-                </a:solidFill>
-                <a:latin typeface="Calibri"/>
-              </a:defRPr>
-            </a:pPr>
-            <a:r>
-              <a:t>• Demandez à Copilot de «raisonner étape par étape» avant de répondre</a:t>
-            </a:r>
-          </a:p>
-          <a:p>
-            <a:pPr>
-              <a:spcAft>
-                <a:spcPts val="400"/>
-              </a:spcAft>
-              <a:defRPr sz="1400">
-                <a:solidFill>
-                  <a:srgbClr val="2B2B2B"/>
-                </a:solidFill>
-                <a:latin typeface="Calibri"/>
-              </a:defRPr>
-            </a:pPr>
-            <a:r>
-              <a:t>• Réduit les erreurs de 50-80% sur les tâches logiques</a:t>
-            </a:r>
-          </a:p>
-          <a:p>
-            <a:pPr>
-              <a:spcAft>
-                <a:spcPts val="400"/>
-              </a:spcAft>
-              <a:defRPr sz="1400">
-                <a:solidFill>
-                  <a:srgbClr val="2B2B2B"/>
-                </a:solidFill>
-                <a:latin typeface="Calibri"/>
-              </a:defRPr>
-            </a:pPr>
-            <a:r>
-              <a:t>• Fonctionne avec TOUS les modèles, même en Quick Response</a:t>
-            </a:r>
-          </a:p>
-        </p:txBody>
-      </p:sp>
-      <p:sp>
-        <p:nvSpPr>
-          <p:cNvPr id="5" name="Rectangle 4"/>
+          <p:cNvPr id="4" name="Rectangle 3"/>
           <p:cNvSpPr/>
           <p:nvPr/>
         </p:nvSpPr>
         <p:spPr>
           <a:xfrm>
-            <a:off x="457200" y="3017520"/>
-            <a:ext cx="5212080" cy="3657600"/>
+            <a:off x="457200" y="1508760"/>
+            <a:ext cx="11274552" cy="18288"/>
           </a:xfrm>
           <a:prstGeom prst="rect">
             <a:avLst/>
           </a:prstGeom>
           <a:solidFill>
-            <a:srgbClr val="FFFFFF"/>
+            <a:srgbClr val="00874E"/>
           </a:solidFill>
           <a:ln>
-            <a:solidFill>
-              <a:srgbClr val="E0E0E0"/>
-            </a:solidFill>
+            <a:noFill/>
           </a:ln>
+          <a:effectLst/>
         </p:spPr>
         <p:style>
           <a:lnRef idx="1">
@@ -4195,50 +4283,14 @@
       </p:sp>
       <p:sp>
         <p:nvSpPr>
-          <p:cNvPr id="6" name="TextBox 5"/>
+          <p:cNvPr id="5" name="TextBox 4"/>
           <p:cNvSpPr txBox="1"/>
           <p:nvPr/>
         </p:nvSpPr>
         <p:spPr>
           <a:xfrm>
-            <a:off x="731520" y="3200400"/>
-            <a:ext cx="4663440" cy="457200"/>
-          </a:xfrm>
-          <a:prstGeom prst="rect">
-            <a:avLst/>
-          </a:prstGeom>
-          <a:noFill/>
-        </p:spPr>
-        <p:txBody>
-          <a:bodyPr wrap="square">
-            <a:spAutoFit/>
-          </a:bodyPr>
-          <a:lstStyle/>
-          <a:p>
-            <a:pPr algn="l">
-              <a:defRPr sz="1800" b="1">
-                <a:solidFill>
-                  <a:srgbClr val="EF4444"/>
-                </a:solidFill>
-                <a:latin typeface="Calibri"/>
-              </a:defRPr>
-            </a:pPr>
-            <a:r>
-              <a:t>❌ Sans CoT (risque d'erreur)</a:t>
-            </a:r>
-          </a:p>
-        </p:txBody>
-      </p:sp>
-      <p:sp>
-        <p:nvSpPr>
-          <p:cNvPr id="7" name="TextBox 6"/>
-          <p:cNvSpPr txBox="1"/>
-          <p:nvPr/>
-        </p:nvSpPr>
-        <p:spPr>
-          <a:xfrm>
-            <a:off x="731520" y="3657600"/>
-            <a:ext cx="4663440" cy="2743200"/>
+            <a:off x="457200" y="1737360"/>
+            <a:ext cx="10972800" cy="1188720"/>
           </a:xfrm>
           <a:prstGeom prst="rect">
             <a:avLst/>
@@ -4255,7 +4307,7 @@
               <a:spcAft>
                 <a:spcPts val="400"/>
               </a:spcAft>
-              <a:defRPr sz="1300">
+              <a:defRPr sz="1400">
                 <a:solidFill>
                   <a:srgbClr val="2B2B2B"/>
                 </a:solidFill>
@@ -4263,7 +4315,7 @@
               </a:defRPr>
             </a:pPr>
             <a:r>
-              <a:t>«Est-ce que cette dépense</a:t>
+              <a:t>• Demandez à Copilot de «raisonner étape par étape» avant de répondre</a:t>
             </a:r>
           </a:p>
           <a:p>
@@ -4271,7 +4323,7 @@
               <a:spcAft>
                 <a:spcPts val="400"/>
               </a:spcAft>
-              <a:defRPr sz="1300">
+              <a:defRPr sz="1400">
                 <a:solidFill>
                   <a:srgbClr val="2B2B2B"/>
                 </a:solidFill>
@@ -4279,7 +4331,7 @@
               </a:defRPr>
             </a:pPr>
             <a:r>
-              <a:t>est conforme à notre</a:t>
+              <a:t>• Réduit les erreurs de 50-80% sur les tâches logiques</a:t>
             </a:r>
           </a:p>
           <a:p>
@@ -4287,7 +4339,7 @@
               <a:spcAft>
                 <a:spcPts val="400"/>
               </a:spcAft>
-              <a:defRPr sz="1300">
+              <a:defRPr sz="1400">
                 <a:solidFill>
                   <a:srgbClr val="2B2B2B"/>
                 </a:solidFill>
@@ -4295,82 +4347,21 @@
               </a:defRPr>
             </a:pPr>
             <a:r>
-              <a:t>politique?»</a:t>
-            </a:r>
-          </a:p>
-          <a:p>
-            <a:pPr>
-              <a:spcAft>
-                <a:spcPts val="400"/>
-              </a:spcAft>
-              <a:defRPr sz="1300">
-                <a:solidFill>
-                  <a:srgbClr val="2B2B2B"/>
-                </a:solidFill>
-                <a:latin typeface="Calibri"/>
-              </a:defRPr>
-            </a:pPr>
-          </a:p>
-          <a:p>
-            <a:pPr>
-              <a:spcAft>
-                <a:spcPts val="400"/>
-              </a:spcAft>
-              <a:defRPr sz="1300">
-                <a:solidFill>
-                  <a:srgbClr val="2B2B2B"/>
-                </a:solidFill>
-                <a:latin typeface="Calibri"/>
-              </a:defRPr>
-            </a:pPr>
-            <a:r>
-              <a:t>→ Copilot répond vite,</a:t>
-            </a:r>
-          </a:p>
-          <a:p>
-            <a:pPr>
-              <a:spcAft>
-                <a:spcPts val="400"/>
-              </a:spcAft>
-              <a:defRPr sz="1300">
-                <a:solidFill>
-                  <a:srgbClr val="2B2B2B"/>
-                </a:solidFill>
-                <a:latin typeface="Calibri"/>
-              </a:defRPr>
-            </a:pPr>
-            <a:r>
-              <a:t>   peut oublier des</a:t>
-            </a:r>
-          </a:p>
-          <a:p>
-            <a:pPr>
-              <a:spcAft>
-                <a:spcPts val="400"/>
-              </a:spcAft>
-              <a:defRPr sz="1300">
-                <a:solidFill>
-                  <a:srgbClr val="2B2B2B"/>
-                </a:solidFill>
-                <a:latin typeface="Calibri"/>
-              </a:defRPr>
-            </a:pPr>
-            <a:r>
-              <a:t>   détails importants</a:t>
-            </a:r>
-          </a:p>
-        </p:txBody>
-      </p:sp>
-      <p:sp>
-        <p:nvSpPr>
-          <p:cNvPr id="8" name="Rectangle 7"/>
+              <a:t>• Fonctionne avec TOUS les modèles, même en Quick Response</a:t>
+            </a:r>
+          </a:p>
+        </p:txBody>
+      </p:sp>
+      <p:sp>
+        <p:nvSpPr>
+          <p:cNvPr id="6" name="Rectangle 5"/>
           <p:cNvSpPr/>
           <p:nvPr/>
         </p:nvSpPr>
         <p:spPr>
           <a:xfrm>
-            <a:off x="5943600" y="3017520"/>
-            <a:ext cx="5212080" cy="3657600"/>
+            <a:off x="457200" y="2926080"/>
+            <a:ext cx="5212080" cy="3291840"/>
           </a:xfrm>
           <a:prstGeom prst="rect">
             <a:avLst/>
@@ -4383,6 +4374,7 @@
               <a:srgbClr val="E0E0E0"/>
             </a:solidFill>
           </a:ln>
+          <a:effectLst/>
         </p:spPr>
         <p:style>
           <a:lnRef idx="1">
@@ -4406,6 +4398,66 @@
           </a:p>
         </p:txBody>
       </p:sp>
+      <p:pic>
+        <p:nvPicPr>
+          <p:cNvPr id="7" name="Picture 6" descr="triangle-alert_EF4444_30.png"/>
+          <p:cNvPicPr>
+            <a:picLocks noChangeAspect="1"/>
+          </p:cNvPicPr>
+          <p:nvPr/>
+        </p:nvPicPr>
+        <p:blipFill>
+          <a:blip r:embed="rId3"/>
+          <a:stretch>
+            <a:fillRect/>
+          </a:stretch>
+        </p:blipFill>
+        <p:spPr>
+          <a:xfrm>
+            <a:off x="713232" y="3090672"/>
+            <a:ext cx="292608" cy="292608"/>
+          </a:xfrm>
+          <a:prstGeom prst="rect">
+            <a:avLst/>
+          </a:prstGeom>
+        </p:spPr>
+      </p:pic>
+      <p:sp>
+        <p:nvSpPr>
+          <p:cNvPr id="8" name="TextBox 7"/>
+          <p:cNvSpPr txBox="1"/>
+          <p:nvPr/>
+        </p:nvSpPr>
+        <p:spPr>
+          <a:xfrm>
+            <a:off x="1115568" y="3108960"/>
+            <a:ext cx="4370832" cy="457200"/>
+          </a:xfrm>
+          <a:prstGeom prst="rect">
+            <a:avLst/>
+          </a:prstGeom>
+          <a:noFill/>
+        </p:spPr>
+        <p:txBody>
+          <a:bodyPr wrap="square" lIns="45720" rIns="45720" tIns="18288" bIns="18288">
+            <a:spAutoFit/>
+          </a:bodyPr>
+          <a:lstStyle/>
+          <a:p>
+            <a:pPr algn="l">
+              <a:defRPr sz="1700" b="1">
+                <a:solidFill>
+                  <a:srgbClr val="EF4444"/>
+                </a:solidFill>
+                <a:latin typeface="Calibri"/>
+              </a:defRPr>
+            </a:pPr>
+            <a:r>
+              <a:t>Sans CoT (risque d'erreur)</a:t>
+            </a:r>
+          </a:p>
+        </p:txBody>
+      </p:sp>
       <p:sp>
         <p:nvSpPr>
           <p:cNvPr id="9" name="TextBox 8"/>
@@ -4414,44 +4466,8 @@
         </p:nvSpPr>
         <p:spPr>
           <a:xfrm>
-            <a:off x="6217920" y="3200400"/>
-            <a:ext cx="4663440" cy="457200"/>
-          </a:xfrm>
-          <a:prstGeom prst="rect">
-            <a:avLst/>
-          </a:prstGeom>
-          <a:noFill/>
-        </p:spPr>
-        <p:txBody>
-          <a:bodyPr wrap="square">
-            <a:spAutoFit/>
-          </a:bodyPr>
-          <a:lstStyle/>
-          <a:p>
-            <a:pPr algn="l">
-              <a:defRPr sz="1800" b="1">
-                <a:solidFill>
-                  <a:srgbClr val="10B981"/>
-                </a:solidFill>
-                <a:latin typeface="Calibri"/>
-              </a:defRPr>
-            </a:pPr>
-            <a:r>
-              <a:t>✅ Avec CoT (fiable)</a:t>
-            </a:r>
-          </a:p>
-        </p:txBody>
-      </p:sp>
-      <p:sp>
-        <p:nvSpPr>
-          <p:cNvPr id="10" name="TextBox 9"/>
-          <p:cNvSpPr txBox="1"/>
-          <p:nvPr/>
-        </p:nvSpPr>
-        <p:spPr>
-          <a:xfrm>
-            <a:off x="6217920" y="3657600"/>
-            <a:ext cx="4663440" cy="2743200"/>
+            <a:off x="731520" y="3703320"/>
+            <a:ext cx="4663440" cy="2331720"/>
           </a:xfrm>
           <a:prstGeom prst="rect">
             <a:avLst/>
@@ -4476,7 +4492,7 @@
               </a:defRPr>
             </a:pPr>
             <a:r>
-              <a:t>«Analyse cette dépense</a:t>
+              <a:t>«Est-ce que cette dépense</a:t>
             </a:r>
           </a:p>
           <a:p>
@@ -4492,7 +4508,7 @@
               </a:defRPr>
             </a:pPr>
             <a:r>
-              <a:t>étape par étape en</a:t>
+              <a:t>est conforme à notre</a:t>
             </a:r>
           </a:p>
           <a:p>
@@ -4508,7 +4524,7 @@
               </a:defRPr>
             </a:pPr>
             <a:r>
-              <a:t>suivant notre politique.</a:t>
+              <a:t>politique?»</a:t>
             </a:r>
           </a:p>
           <a:p>
@@ -4523,9 +4539,6 @@
                 <a:latin typeface="Calibri"/>
               </a:defRPr>
             </a:pPr>
-            <a:r>
-              <a:t>Est-elle conforme?»</a:t>
-            </a:r>
           </a:p>
           <a:p>
             <a:pPr>
@@ -4539,6 +4552,9 @@
                 <a:latin typeface="Calibri"/>
               </a:defRPr>
             </a:pPr>
+            <a:r>
+              <a:t>→ Copilot répond vite,</a:t>
+            </a:r>
           </a:p>
           <a:p>
             <a:pPr>
@@ -4553,7 +4569,7 @@
               </a:defRPr>
             </a:pPr>
             <a:r>
-              <a:t>→ Copilot décompose,</a:t>
+              <a:t>peut oublier des</a:t>
             </a:r>
           </a:p>
           <a:p>
@@ -4569,9 +4585,138 @@
               </a:defRPr>
             </a:pPr>
             <a:r>
-              <a:t>   vérifie chaque point,</a:t>
-            </a:r>
-          </a:p>
+              <a:t>détails importants</a:t>
+            </a:r>
+          </a:p>
+        </p:txBody>
+      </p:sp>
+      <p:sp>
+        <p:nvSpPr>
+          <p:cNvPr id="10" name="Rectangle 9"/>
+          <p:cNvSpPr/>
+          <p:nvPr/>
+        </p:nvSpPr>
+        <p:spPr>
+          <a:xfrm>
+            <a:off x="5943600" y="2926080"/>
+            <a:ext cx="5212080" cy="3291840"/>
+          </a:xfrm>
+          <a:prstGeom prst="rect">
+            <a:avLst/>
+          </a:prstGeom>
+          <a:solidFill>
+            <a:srgbClr val="FFFFFF"/>
+          </a:solidFill>
+          <a:ln>
+            <a:solidFill>
+              <a:srgbClr val="E0E0E0"/>
+            </a:solidFill>
+          </a:ln>
+          <a:effectLst/>
+        </p:spPr>
+        <p:style>
+          <a:lnRef idx="1">
+            <a:schemeClr val="accent1"/>
+          </a:lnRef>
+          <a:fillRef idx="3">
+            <a:schemeClr val="accent1"/>
+          </a:fillRef>
+          <a:effectRef idx="2">
+            <a:schemeClr val="accent1"/>
+          </a:effectRef>
+          <a:fontRef idx="minor">
+            <a:schemeClr val="lt1"/>
+          </a:fontRef>
+        </p:style>
+        <p:txBody>
+          <a:bodyPr rtlCol="0" anchor="ctr"/>
+          <a:lstStyle/>
+          <a:p>
+            <a:pPr algn="ctr"/>
+          </a:p>
+        </p:txBody>
+      </p:sp>
+      <p:pic>
+        <p:nvPicPr>
+          <p:cNvPr id="11" name="Picture 10" descr="list-ordered_00874E_30.png"/>
+          <p:cNvPicPr>
+            <a:picLocks noChangeAspect="1"/>
+          </p:cNvPicPr>
+          <p:nvPr/>
+        </p:nvPicPr>
+        <p:blipFill>
+          <a:blip r:embed="rId4"/>
+          <a:stretch>
+            <a:fillRect/>
+          </a:stretch>
+        </p:blipFill>
+        <p:spPr>
+          <a:xfrm>
+            <a:off x="6199632" y="3090672"/>
+            <a:ext cx="292608" cy="292608"/>
+          </a:xfrm>
+          <a:prstGeom prst="rect">
+            <a:avLst/>
+          </a:prstGeom>
+        </p:spPr>
+      </p:pic>
+      <p:sp>
+        <p:nvSpPr>
+          <p:cNvPr id="12" name="TextBox 11"/>
+          <p:cNvSpPr txBox="1"/>
+          <p:nvPr/>
+        </p:nvSpPr>
+        <p:spPr>
+          <a:xfrm>
+            <a:off x="6601968" y="3108960"/>
+            <a:ext cx="4370831" cy="457200"/>
+          </a:xfrm>
+          <a:prstGeom prst="rect">
+            <a:avLst/>
+          </a:prstGeom>
+          <a:noFill/>
+        </p:spPr>
+        <p:txBody>
+          <a:bodyPr wrap="square" lIns="45720" rIns="45720" tIns="18288" bIns="18288">
+            <a:spAutoFit/>
+          </a:bodyPr>
+          <a:lstStyle/>
+          <a:p>
+            <a:pPr algn="l">
+              <a:defRPr sz="1700" b="1">
+                <a:solidFill>
+                  <a:srgbClr val="00874E"/>
+                </a:solidFill>
+                <a:latin typeface="Calibri"/>
+              </a:defRPr>
+            </a:pPr>
+            <a:r>
+              <a:t>Avec CoT (fiable)</a:t>
+            </a:r>
+          </a:p>
+        </p:txBody>
+      </p:sp>
+      <p:sp>
+        <p:nvSpPr>
+          <p:cNvPr id="13" name="TextBox 12"/>
+          <p:cNvSpPr txBox="1"/>
+          <p:nvPr/>
+        </p:nvSpPr>
+        <p:spPr>
+          <a:xfrm>
+            <a:off x="6217920" y="3703320"/>
+            <a:ext cx="4663440" cy="2331720"/>
+          </a:xfrm>
+          <a:prstGeom prst="rect">
+            <a:avLst/>
+          </a:prstGeom>
+          <a:noFill/>
+        </p:spPr>
+        <p:txBody>
+          <a:bodyPr wrap="square">
+            <a:spAutoFit/>
+          </a:bodyPr>
+          <a:lstStyle/>
           <a:p>
             <a:pPr>
               <a:spcAft>
@@ -4585,7 +4730,232 @@
               </a:defRPr>
             </a:pPr>
             <a:r>
-              <a:t>   réponse fiable</a:t>
+              <a:t>«Analyse cette dépense</a:t>
+            </a:r>
+          </a:p>
+          <a:p>
+            <a:pPr>
+              <a:spcAft>
+                <a:spcPts val="400"/>
+              </a:spcAft>
+              <a:defRPr sz="1300">
+                <a:solidFill>
+                  <a:srgbClr val="2B2B2B"/>
+                </a:solidFill>
+                <a:latin typeface="Calibri"/>
+              </a:defRPr>
+            </a:pPr>
+            <a:r>
+              <a:t>étape par étape en</a:t>
+            </a:r>
+          </a:p>
+          <a:p>
+            <a:pPr>
+              <a:spcAft>
+                <a:spcPts val="400"/>
+              </a:spcAft>
+              <a:defRPr sz="1300">
+                <a:solidFill>
+                  <a:srgbClr val="2B2B2B"/>
+                </a:solidFill>
+                <a:latin typeface="Calibri"/>
+              </a:defRPr>
+            </a:pPr>
+            <a:r>
+              <a:t>suivant notre politique.</a:t>
+            </a:r>
+          </a:p>
+          <a:p>
+            <a:pPr>
+              <a:spcAft>
+                <a:spcPts val="400"/>
+              </a:spcAft>
+              <a:defRPr sz="1300">
+                <a:solidFill>
+                  <a:srgbClr val="2B2B2B"/>
+                </a:solidFill>
+                <a:latin typeface="Calibri"/>
+              </a:defRPr>
+            </a:pPr>
+            <a:r>
+              <a:t>Est-elle conforme?»</a:t>
+            </a:r>
+          </a:p>
+          <a:p>
+            <a:pPr>
+              <a:spcAft>
+                <a:spcPts val="400"/>
+              </a:spcAft>
+              <a:defRPr sz="1300">
+                <a:solidFill>
+                  <a:srgbClr val="2B2B2B"/>
+                </a:solidFill>
+                <a:latin typeface="Calibri"/>
+              </a:defRPr>
+            </a:pPr>
+          </a:p>
+          <a:p>
+            <a:pPr>
+              <a:spcAft>
+                <a:spcPts val="400"/>
+              </a:spcAft>
+              <a:defRPr sz="1300">
+                <a:solidFill>
+                  <a:srgbClr val="2B2B2B"/>
+                </a:solidFill>
+                <a:latin typeface="Calibri"/>
+              </a:defRPr>
+            </a:pPr>
+            <a:r>
+              <a:t>→ Copilot décompose,</a:t>
+            </a:r>
+          </a:p>
+          <a:p>
+            <a:pPr>
+              <a:spcAft>
+                <a:spcPts val="400"/>
+              </a:spcAft>
+              <a:defRPr sz="1300">
+                <a:solidFill>
+                  <a:srgbClr val="2B2B2B"/>
+                </a:solidFill>
+                <a:latin typeface="Calibri"/>
+              </a:defRPr>
+            </a:pPr>
+            <a:r>
+              <a:t>vérifie chaque point,</a:t>
+            </a:r>
+          </a:p>
+          <a:p>
+            <a:pPr>
+              <a:spcAft>
+                <a:spcPts val="400"/>
+              </a:spcAft>
+              <a:defRPr sz="1300">
+                <a:solidFill>
+                  <a:srgbClr val="2B2B2B"/>
+                </a:solidFill>
+                <a:latin typeface="Calibri"/>
+              </a:defRPr>
+            </a:pPr>
+            <a:r>
+              <a:t>réponse fiable</a:t>
+            </a:r>
+          </a:p>
+        </p:txBody>
+      </p:sp>
+      <p:sp>
+        <p:nvSpPr>
+          <p:cNvPr id="14" name="Rectangle 13"/>
+          <p:cNvSpPr/>
+          <p:nvPr/>
+        </p:nvSpPr>
+        <p:spPr>
+          <a:xfrm>
+            <a:off x="457200" y="6446520"/>
+            <a:ext cx="11274552" cy="13716"/>
+          </a:xfrm>
+          <a:prstGeom prst="rect">
+            <a:avLst/>
+          </a:prstGeom>
+          <a:solidFill>
+            <a:srgbClr val="00874E"/>
+          </a:solidFill>
+          <a:ln>
+            <a:noFill/>
+          </a:ln>
+          <a:effectLst/>
+        </p:spPr>
+        <p:style>
+          <a:lnRef idx="1">
+            <a:schemeClr val="accent1"/>
+          </a:lnRef>
+          <a:fillRef idx="3">
+            <a:schemeClr val="accent1"/>
+          </a:fillRef>
+          <a:effectRef idx="2">
+            <a:schemeClr val="accent1"/>
+          </a:effectRef>
+          <a:fontRef idx="minor">
+            <a:schemeClr val="lt1"/>
+          </a:fontRef>
+        </p:style>
+        <p:txBody>
+          <a:bodyPr rtlCol="0" anchor="ctr"/>
+          <a:lstStyle/>
+          <a:p>
+            <a:pPr algn="ctr"/>
+          </a:p>
+        </p:txBody>
+      </p:sp>
+      <p:sp>
+        <p:nvSpPr>
+          <p:cNvPr id="15" name="TextBox 14"/>
+          <p:cNvSpPr txBox="1"/>
+          <p:nvPr/>
+        </p:nvSpPr>
+        <p:spPr>
+          <a:xfrm>
+            <a:off x="457200" y="6537960"/>
+            <a:ext cx="5486400" cy="274320"/>
+          </a:xfrm>
+          <a:prstGeom prst="rect">
+            <a:avLst/>
+          </a:prstGeom>
+          <a:noFill/>
+        </p:spPr>
+        <p:txBody>
+          <a:bodyPr wrap="square" lIns="45720" rIns="45720" tIns="18288" bIns="18288">
+            <a:spAutoFit/>
+          </a:bodyPr>
+          <a:lstStyle/>
+          <a:p>
+            <a:pPr algn="l">
+              <a:defRPr sz="1000" b="0">
+                <a:solidFill>
+                  <a:srgbClr val="6B6B6B"/>
+                </a:solidFill>
+                <a:latin typeface="Calibri"/>
+              </a:defRPr>
+            </a:pPr>
+            <a:r>
+              <a:t>La minute Copilot</a:t>
+            </a:r>
+          </a:p>
+        </p:txBody>
+      </p:sp>
+      <p:sp>
+        <p:nvSpPr>
+          <p:cNvPr id="16" name="TextBox 15"/>
+          <p:cNvSpPr txBox="1"/>
+          <p:nvPr/>
+        </p:nvSpPr>
+        <p:spPr>
+          <a:xfrm>
+            <a:off x="10972800" y="6537960"/>
+            <a:ext cx="822960" cy="274320"/>
+          </a:xfrm>
+          <a:prstGeom prst="rect">
+            <a:avLst/>
+          </a:prstGeom>
+          <a:noFill/>
+        </p:spPr>
+        <p:txBody>
+          <a:bodyPr wrap="square" lIns="45720" rIns="45720" tIns="18288" bIns="18288">
+            <a:spAutoFit/>
+          </a:bodyPr>
+          <a:lstStyle/>
+          <a:p>
+            <a:pPr algn="r">
+              <a:defRPr sz="1000" b="0">
+                <a:solidFill>
+                  <a:srgbClr val="6B6B6B"/>
+                </a:solidFill>
+                <a:latin typeface="Calibri"/>
+              </a:defRPr>
+            </a:pPr>
+            <a:r>
+              <a:t>2</a:t>
             </a:r>
           </a:p>
         </p:txBody>
@@ -4604,7 +4974,7 @@
     <p:bg>
       <p:bgPr>
         <a:solidFill>
-          <a:srgbClr val="FFFFFF"/>
+          <a:srgbClr val="E6F0EA"/>
         </a:solidFill>
         <a:effectLst/>
       </p:bgPr>
@@ -4624,8 +4994,8 @@
         </p:nvSpPr>
         <p:spPr>
           <a:xfrm>
-            <a:off x="457200" y="274320"/>
-            <a:ext cx="10972800" cy="640080"/>
+            <a:off x="457200" y="365760"/>
+            <a:ext cx="10972800" cy="731520"/>
           </a:xfrm>
           <a:prstGeom prst="rect">
             <a:avLst/>
@@ -4633,21 +5003,21 @@
           <a:noFill/>
         </p:spPr>
         <p:txBody>
-          <a:bodyPr wrap="square">
+          <a:bodyPr wrap="square" lIns="45720" rIns="45720" tIns="18288" bIns="18288">
             <a:spAutoFit/>
           </a:bodyPr>
           <a:lstStyle/>
           <a:p>
             <a:pPr algn="l">
-              <a:defRPr sz="3200" b="1">
-                <a:solidFill>
-                  <a:srgbClr val="2B2B2B"/>
-                </a:solidFill>
-                <a:latin typeface="Calibri"/>
-              </a:defRPr>
-            </a:pPr>
-            <a:r>
-              <a:t>🌳 Tree of Thought (ToT) — Explorer plusieurs pistes</a:t>
+              <a:defRPr sz="2800" b="1">
+                <a:solidFill>
+                  <a:srgbClr val="006B3F"/>
+                </a:solidFill>
+                <a:latin typeface="Calibri"/>
+              </a:defRPr>
+            </a:pPr>
+            <a:r>
+              <a:t>Tree of Thought (ToT) — Explorer plusieurs pistes</a:t>
             </a:r>
           </a:p>
         </p:txBody>
@@ -4660,8 +5030,8 @@
         </p:nvSpPr>
         <p:spPr>
           <a:xfrm>
-            <a:off x="457200" y="914400"/>
-            <a:ext cx="10972800" cy="457200"/>
+            <a:off x="457200" y="1005840"/>
+            <a:ext cx="10972800" cy="411480"/>
           </a:xfrm>
           <a:prstGeom prst="rect">
             <a:avLst/>
@@ -4669,13 +5039,13 @@
           <a:noFill/>
         </p:spPr>
         <p:txBody>
-          <a:bodyPr wrap="square">
+          <a:bodyPr wrap="square" lIns="45720" rIns="45720" tIns="18288" bIns="18288">
             <a:spAutoFit/>
           </a:bodyPr>
           <a:lstStyle/>
           <a:p>
             <a:pPr algn="l">
-              <a:defRPr sz="1800" b="0">
+              <a:defRPr sz="1500" b="0">
                 <a:solidFill>
                   <a:srgbClr val="6B6B6B"/>
                 </a:solidFill>
@@ -4690,97 +5060,25 @@
       </p:sp>
       <p:sp>
         <p:nvSpPr>
-          <p:cNvPr id="4" name="TextBox 3"/>
-          <p:cNvSpPr txBox="1"/>
-          <p:nvPr/>
-        </p:nvSpPr>
-        <p:spPr>
-          <a:xfrm>
-            <a:off x="457200" y="1554480"/>
-            <a:ext cx="10972800" cy="1371600"/>
-          </a:xfrm>
-          <a:prstGeom prst="rect">
-            <a:avLst/>
-          </a:prstGeom>
-          <a:noFill/>
-        </p:spPr>
-        <p:txBody>
-          <a:bodyPr wrap="square">
-            <a:spAutoFit/>
-          </a:bodyPr>
-          <a:lstStyle/>
-          <a:p>
-            <a:pPr>
-              <a:spcAft>
-                <a:spcPts val="400"/>
-              </a:spcAft>
-              <a:defRPr sz="1400">
-                <a:solidFill>
-                  <a:srgbClr val="2B2B2B"/>
-                </a:solidFill>
-                <a:latin typeface="Calibri"/>
-              </a:defRPr>
-            </a:pPr>
-            <a:r>
-              <a:t>• Copilot explore plusieurs scénarios ou solutions en parallèle</a:t>
-            </a:r>
-          </a:p>
-          <a:p>
-            <a:pPr>
-              <a:spcAft>
-                <a:spcPts val="400"/>
-              </a:spcAft>
-              <a:defRPr sz="1400">
-                <a:solidFill>
-                  <a:srgbClr val="2B2B2B"/>
-                </a:solidFill>
-                <a:latin typeface="Calibri"/>
-              </a:defRPr>
-            </a:pPr>
-            <a:r>
-              <a:t>• Compare les options et choisit la meilleure</a:t>
-            </a:r>
-          </a:p>
-          <a:p>
-            <a:pPr>
-              <a:spcAft>
-                <a:spcPts val="400"/>
-              </a:spcAft>
-              <a:defRPr sz="1400">
-                <a:solidFill>
-                  <a:srgbClr val="2B2B2B"/>
-                </a:solidFill>
-                <a:latin typeface="Calibri"/>
-              </a:defRPr>
-            </a:pPr>
-            <a:r>
-              <a:t>• Idéal pour prises de décision, analyses de risques, planification</a:t>
-            </a:r>
-          </a:p>
-        </p:txBody>
-      </p:sp>
-      <p:sp>
-        <p:nvSpPr>
-          <p:cNvPr id="5" name="Rectangle 4"/>
+          <p:cNvPr id="4" name="Rectangle 3"/>
           <p:cNvSpPr/>
           <p:nvPr/>
         </p:nvSpPr>
         <p:spPr>
           <a:xfrm>
-            <a:off x="457200" y="3017520"/>
-            <a:ext cx="5212080" cy="3657600"/>
+            <a:off x="457200" y="1508760"/>
+            <a:ext cx="11274552" cy="18288"/>
           </a:xfrm>
           <a:prstGeom prst="rect">
             <a:avLst/>
           </a:prstGeom>
           <a:solidFill>
-            <a:srgbClr val="FFFFFF"/>
+            <a:srgbClr val="00874E"/>
           </a:solidFill>
           <a:ln>
-            <a:solidFill>
-              <a:srgbClr val="E0E0E0"/>
-            </a:solidFill>
+            <a:noFill/>
           </a:ln>
+          <a:effectLst/>
         </p:spPr>
         <p:style>
           <a:lnRef idx="1">
@@ -4806,50 +5104,14 @@
       </p:sp>
       <p:sp>
         <p:nvSpPr>
-          <p:cNvPr id="6" name="TextBox 5"/>
+          <p:cNvPr id="5" name="TextBox 4"/>
           <p:cNvSpPr txBox="1"/>
           <p:nvPr/>
         </p:nvSpPr>
         <p:spPr>
           <a:xfrm>
-            <a:off x="731520" y="3200400"/>
-            <a:ext cx="4663440" cy="457200"/>
-          </a:xfrm>
-          <a:prstGeom prst="rect">
-            <a:avLst/>
-          </a:prstGeom>
-          <a:noFill/>
-        </p:spPr>
-        <p:txBody>
-          <a:bodyPr wrap="square">
-            <a:spAutoFit/>
-          </a:bodyPr>
-          <a:lstStyle/>
-          <a:p>
-            <a:pPr algn="l">
-              <a:defRPr sz="1800" b="1">
-                <a:solidFill>
-                  <a:srgbClr val="0078D4"/>
-                </a:solidFill>
-                <a:latin typeface="Calibri"/>
-              </a:defRPr>
-            </a:pPr>
-            <a:r>
-              <a:t>🌳 Exemple ToT</a:t>
-            </a:r>
-          </a:p>
-        </p:txBody>
-      </p:sp>
-      <p:sp>
-        <p:nvSpPr>
-          <p:cNvPr id="7" name="TextBox 6"/>
-          <p:cNvSpPr txBox="1"/>
-          <p:nvPr/>
-        </p:nvSpPr>
-        <p:spPr>
-          <a:xfrm>
-            <a:off x="731520" y="3657600"/>
-            <a:ext cx="4663440" cy="2743200"/>
+            <a:off x="457200" y="1737360"/>
+            <a:ext cx="10972800" cy="1188720"/>
           </a:xfrm>
           <a:prstGeom prst="rect">
             <a:avLst/>
@@ -4866,7 +5128,7 @@
               <a:spcAft>
                 <a:spcPts val="400"/>
               </a:spcAft>
-              <a:defRPr sz="1300">
+              <a:defRPr sz="1400">
                 <a:solidFill>
                   <a:srgbClr val="2B2B2B"/>
                 </a:solidFill>
@@ -4874,7 +5136,7 @@
               </a:defRPr>
             </a:pPr>
             <a:r>
-              <a:t>«Nous devons migrer notre</a:t>
+              <a:t>• Copilot explore plusieurs scénarios ou solutions en parallèle</a:t>
             </a:r>
           </a:p>
           <a:p>
@@ -4882,7 +5144,7 @@
               <a:spcAft>
                 <a:spcPts val="400"/>
               </a:spcAft>
-              <a:defRPr sz="1300">
+              <a:defRPr sz="1400">
                 <a:solidFill>
                   <a:srgbClr val="2B2B2B"/>
                 </a:solidFill>
@@ -4890,7 +5152,7 @@
               </a:defRPr>
             </a:pPr>
             <a:r>
-              <a:t>serveur de fichiers. Explore</a:t>
+              <a:t>• Compare les options et choisit la meilleure</a:t>
             </a:r>
           </a:p>
           <a:p>
@@ -4898,7 +5160,7 @@
               <a:spcAft>
                 <a:spcPts val="400"/>
               </a:spcAft>
-              <a:defRPr sz="1300">
+              <a:defRPr sz="1400">
                 <a:solidFill>
                   <a:srgbClr val="2B2B2B"/>
                 </a:solidFill>
@@ -4906,69 +5168,21 @@
               </a:defRPr>
             </a:pPr>
             <a:r>
-              <a:t>3 options: SharePoint,</a:t>
-            </a:r>
-          </a:p>
-          <a:p>
-            <a:pPr>
-              <a:spcAft>
-                <a:spcPts val="400"/>
-              </a:spcAft>
-              <a:defRPr sz="1300">
-                <a:solidFill>
-                  <a:srgbClr val="2B2B2B"/>
-                </a:solidFill>
-                <a:latin typeface="Calibri"/>
-              </a:defRPr>
-            </a:pPr>
-            <a:r>
-              <a:t>OneDrive, Azure Files.</a:t>
-            </a:r>
-          </a:p>
-          <a:p>
-            <a:pPr>
-              <a:spcAft>
-                <a:spcPts val="400"/>
-              </a:spcAft>
-              <a:defRPr sz="1300">
-                <a:solidFill>
-                  <a:srgbClr val="2B2B2B"/>
-                </a:solidFill>
-                <a:latin typeface="Calibri"/>
-              </a:defRPr>
-            </a:pPr>
-            <a:r>
-              <a:t>Compare coûts, sécurité,</a:t>
-            </a:r>
-          </a:p>
-          <a:p>
-            <a:pPr>
-              <a:spcAft>
-                <a:spcPts val="400"/>
-              </a:spcAft>
-              <a:defRPr sz="1300">
-                <a:solidFill>
-                  <a:srgbClr val="2B2B2B"/>
-                </a:solidFill>
-                <a:latin typeface="Calibri"/>
-              </a:defRPr>
-            </a:pPr>
-            <a:r>
-              <a:t>effort et recommande.</a:t>
-            </a:r>
-          </a:p>
-        </p:txBody>
-      </p:sp>
-      <p:sp>
-        <p:nvSpPr>
-          <p:cNvPr id="8" name="Rectangle 7"/>
+              <a:t>• Idéal pour prises de décision, analyses de risques, planification</a:t>
+            </a:r>
+          </a:p>
+        </p:txBody>
+      </p:sp>
+      <p:sp>
+        <p:nvSpPr>
+          <p:cNvPr id="6" name="Rectangle 5"/>
           <p:cNvSpPr/>
           <p:nvPr/>
         </p:nvSpPr>
         <p:spPr>
           <a:xfrm>
-            <a:off x="5943600" y="3017520"/>
-            <a:ext cx="5212080" cy="3657600"/>
+            <a:off x="457200" y="2926080"/>
+            <a:ext cx="5212080" cy="3291840"/>
           </a:xfrm>
           <a:prstGeom prst="rect">
             <a:avLst/>
@@ -4981,6 +5195,7 @@
               <a:srgbClr val="E0E0E0"/>
             </a:solidFill>
           </a:ln>
+          <a:effectLst/>
         </p:spPr>
         <p:style>
           <a:lnRef idx="1">
@@ -5004,6 +5219,66 @@
           </a:p>
         </p:txBody>
       </p:sp>
+      <p:pic>
+        <p:nvPicPr>
+          <p:cNvPr id="7" name="Picture 6" descr="git-branch_00874E_30.png"/>
+          <p:cNvPicPr>
+            <a:picLocks noChangeAspect="1"/>
+          </p:cNvPicPr>
+          <p:nvPr/>
+        </p:nvPicPr>
+        <p:blipFill>
+          <a:blip r:embed="rId3"/>
+          <a:stretch>
+            <a:fillRect/>
+          </a:stretch>
+        </p:blipFill>
+        <p:spPr>
+          <a:xfrm>
+            <a:off x="713232" y="3090672"/>
+            <a:ext cx="292608" cy="292608"/>
+          </a:xfrm>
+          <a:prstGeom prst="rect">
+            <a:avLst/>
+          </a:prstGeom>
+        </p:spPr>
+      </p:pic>
+      <p:sp>
+        <p:nvSpPr>
+          <p:cNvPr id="8" name="TextBox 7"/>
+          <p:cNvSpPr txBox="1"/>
+          <p:nvPr/>
+        </p:nvSpPr>
+        <p:spPr>
+          <a:xfrm>
+            <a:off x="1115568" y="3108960"/>
+            <a:ext cx="4370832" cy="457200"/>
+          </a:xfrm>
+          <a:prstGeom prst="rect">
+            <a:avLst/>
+          </a:prstGeom>
+          <a:noFill/>
+        </p:spPr>
+        <p:txBody>
+          <a:bodyPr wrap="square" lIns="45720" rIns="45720" tIns="18288" bIns="18288">
+            <a:spAutoFit/>
+          </a:bodyPr>
+          <a:lstStyle/>
+          <a:p>
+            <a:pPr algn="l">
+              <a:defRPr sz="1700" b="1">
+                <a:solidFill>
+                  <a:srgbClr val="00874E"/>
+                </a:solidFill>
+                <a:latin typeface="Calibri"/>
+              </a:defRPr>
+            </a:pPr>
+            <a:r>
+              <a:t>Exemple ToT</a:t>
+            </a:r>
+          </a:p>
+        </p:txBody>
+      </p:sp>
       <p:sp>
         <p:nvSpPr>
           <p:cNvPr id="9" name="TextBox 8"/>
@@ -5012,44 +5287,8 @@
         </p:nvSpPr>
         <p:spPr>
           <a:xfrm>
-            <a:off x="6217920" y="3200400"/>
-            <a:ext cx="4663440" cy="457200"/>
-          </a:xfrm>
-          <a:prstGeom prst="rect">
-            <a:avLst/>
-          </a:prstGeom>
-          <a:noFill/>
-        </p:spPr>
-        <p:txBody>
-          <a:bodyPr wrap="square">
-            <a:spAutoFit/>
-          </a:bodyPr>
-          <a:lstStyle/>
-          <a:p>
-            <a:pPr algn="l">
-              <a:defRPr sz="1800" b="1">
-                <a:solidFill>
-                  <a:srgbClr val="10B981"/>
-                </a:solidFill>
-                <a:latin typeface="Calibri"/>
-              </a:defRPr>
-            </a:pPr>
-            <a:r>
-              <a:t>📊 Quand l'utiliser</a:t>
-            </a:r>
-          </a:p>
-        </p:txBody>
-      </p:sp>
-      <p:sp>
-        <p:nvSpPr>
-          <p:cNvPr id="10" name="TextBox 9"/>
-          <p:cNvSpPr txBox="1"/>
-          <p:nvPr/>
-        </p:nvSpPr>
-        <p:spPr>
-          <a:xfrm>
-            <a:off x="6217920" y="3657600"/>
-            <a:ext cx="4663440" cy="2743200"/>
+            <a:off x="731520" y="3703320"/>
+            <a:ext cx="4663440" cy="2331720"/>
           </a:xfrm>
           <a:prstGeom prst="rect">
             <a:avLst/>
@@ -5074,7 +5313,7 @@
               </a:defRPr>
             </a:pPr>
             <a:r>
-              <a:t>✅ Décisions stratégiques</a:t>
+              <a:t>«Nous devons migrer notre</a:t>
             </a:r>
           </a:p>
           <a:p>
@@ -5090,7 +5329,7 @@
               </a:defRPr>
             </a:pPr>
             <a:r>
-              <a:t>✅ Analyse coûts/bénéfices</a:t>
+              <a:t>serveur de fichiers. Explore</a:t>
             </a:r>
           </a:p>
           <a:p>
@@ -5106,7 +5345,7 @@
               </a:defRPr>
             </a:pPr>
             <a:r>
-              <a:t>✅ Choix techniques</a:t>
+              <a:t>3 options: SharePoint,</a:t>
             </a:r>
           </a:p>
           <a:p>
@@ -5122,7 +5361,7 @@
               </a:defRPr>
             </a:pPr>
             <a:r>
-              <a:t>✅ Planification de projet</a:t>
+              <a:t>OneDrive, Azure Files.</a:t>
             </a:r>
           </a:p>
           <a:p>
@@ -5137,6 +5376,9 @@
                 <a:latin typeface="Calibri"/>
               </a:defRPr>
             </a:pPr>
+            <a:r>
+              <a:t>Compare coûts, sécurité,</a:t>
+            </a:r>
           </a:p>
           <a:p>
             <a:pPr>
@@ -5151,9 +5393,138 @@
               </a:defRPr>
             </a:pPr>
             <a:r>
-              <a:t>💡 En mode Think Deeper</a:t>
-            </a:r>
-          </a:p>
+              <a:t>effort et recommande.</a:t>
+            </a:r>
+          </a:p>
+        </p:txBody>
+      </p:sp>
+      <p:sp>
+        <p:nvSpPr>
+          <p:cNvPr id="10" name="Rectangle 9"/>
+          <p:cNvSpPr/>
+          <p:nvPr/>
+        </p:nvSpPr>
+        <p:spPr>
+          <a:xfrm>
+            <a:off x="5943600" y="2926080"/>
+            <a:ext cx="5212080" cy="3291840"/>
+          </a:xfrm>
+          <a:prstGeom prst="rect">
+            <a:avLst/>
+          </a:prstGeom>
+          <a:solidFill>
+            <a:srgbClr val="FFFFFF"/>
+          </a:solidFill>
+          <a:ln>
+            <a:solidFill>
+              <a:srgbClr val="E0E0E0"/>
+            </a:solidFill>
+          </a:ln>
+          <a:effectLst/>
+        </p:spPr>
+        <p:style>
+          <a:lnRef idx="1">
+            <a:schemeClr val="accent1"/>
+          </a:lnRef>
+          <a:fillRef idx="3">
+            <a:schemeClr val="accent1"/>
+          </a:fillRef>
+          <a:effectRef idx="2">
+            <a:schemeClr val="accent1"/>
+          </a:effectRef>
+          <a:fontRef idx="minor">
+            <a:schemeClr val="lt1"/>
+          </a:fontRef>
+        </p:style>
+        <p:txBody>
+          <a:bodyPr rtlCol="0" anchor="ctr"/>
+          <a:lstStyle/>
+          <a:p>
+            <a:pPr algn="ctr"/>
+          </a:p>
+        </p:txBody>
+      </p:sp>
+      <p:pic>
+        <p:nvPicPr>
+          <p:cNvPr id="11" name="Picture 10" descr="circle-help_00874E_30.png"/>
+          <p:cNvPicPr>
+            <a:picLocks noChangeAspect="1"/>
+          </p:cNvPicPr>
+          <p:nvPr/>
+        </p:nvPicPr>
+        <p:blipFill>
+          <a:blip r:embed="rId4"/>
+          <a:stretch>
+            <a:fillRect/>
+          </a:stretch>
+        </p:blipFill>
+        <p:spPr>
+          <a:xfrm>
+            <a:off x="6199632" y="3090672"/>
+            <a:ext cx="292608" cy="292608"/>
+          </a:xfrm>
+          <a:prstGeom prst="rect">
+            <a:avLst/>
+          </a:prstGeom>
+        </p:spPr>
+      </p:pic>
+      <p:sp>
+        <p:nvSpPr>
+          <p:cNvPr id="12" name="TextBox 11"/>
+          <p:cNvSpPr txBox="1"/>
+          <p:nvPr/>
+        </p:nvSpPr>
+        <p:spPr>
+          <a:xfrm>
+            <a:off x="6601968" y="3108960"/>
+            <a:ext cx="4370831" cy="457200"/>
+          </a:xfrm>
+          <a:prstGeom prst="rect">
+            <a:avLst/>
+          </a:prstGeom>
+          <a:noFill/>
+        </p:spPr>
+        <p:txBody>
+          <a:bodyPr wrap="square" lIns="45720" rIns="45720" tIns="18288" bIns="18288">
+            <a:spAutoFit/>
+          </a:bodyPr>
+          <a:lstStyle/>
+          <a:p>
+            <a:pPr algn="l">
+              <a:defRPr sz="1700" b="1">
+                <a:solidFill>
+                  <a:srgbClr val="00874E"/>
+                </a:solidFill>
+                <a:latin typeface="Calibri"/>
+              </a:defRPr>
+            </a:pPr>
+            <a:r>
+              <a:t>Quand l'utiliser</a:t>
+            </a:r>
+          </a:p>
+        </p:txBody>
+      </p:sp>
+      <p:sp>
+        <p:nvSpPr>
+          <p:cNvPr id="13" name="TextBox 12"/>
+          <p:cNvSpPr txBox="1"/>
+          <p:nvPr/>
+        </p:nvSpPr>
+        <p:spPr>
+          <a:xfrm>
+            <a:off x="6217920" y="3703320"/>
+            <a:ext cx="4663440" cy="2331720"/>
+          </a:xfrm>
+          <a:prstGeom prst="rect">
+            <a:avLst/>
+          </a:prstGeom>
+          <a:noFill/>
+        </p:spPr>
+        <p:txBody>
+          <a:bodyPr wrap="square">
+            <a:spAutoFit/>
+          </a:bodyPr>
+          <a:lstStyle/>
           <a:p>
             <a:pPr>
               <a:spcAft>
@@ -5167,7 +5538,216 @@
               </a:defRPr>
             </a:pPr>
             <a:r>
-              <a:t>   pour meilleurs résultats</a:t>
+              <a:t>Décisions stratégiques</a:t>
+            </a:r>
+          </a:p>
+          <a:p>
+            <a:pPr>
+              <a:spcAft>
+                <a:spcPts val="400"/>
+              </a:spcAft>
+              <a:defRPr sz="1300">
+                <a:solidFill>
+                  <a:srgbClr val="2B2B2B"/>
+                </a:solidFill>
+                <a:latin typeface="Calibri"/>
+              </a:defRPr>
+            </a:pPr>
+            <a:r>
+              <a:t>Analyse coûts/bénéfices</a:t>
+            </a:r>
+          </a:p>
+          <a:p>
+            <a:pPr>
+              <a:spcAft>
+                <a:spcPts val="400"/>
+              </a:spcAft>
+              <a:defRPr sz="1300">
+                <a:solidFill>
+                  <a:srgbClr val="2B2B2B"/>
+                </a:solidFill>
+                <a:latin typeface="Calibri"/>
+              </a:defRPr>
+            </a:pPr>
+            <a:r>
+              <a:t>Choix techniques</a:t>
+            </a:r>
+          </a:p>
+          <a:p>
+            <a:pPr>
+              <a:spcAft>
+                <a:spcPts val="400"/>
+              </a:spcAft>
+              <a:defRPr sz="1300">
+                <a:solidFill>
+                  <a:srgbClr val="2B2B2B"/>
+                </a:solidFill>
+                <a:latin typeface="Calibri"/>
+              </a:defRPr>
+            </a:pPr>
+            <a:r>
+              <a:t>Planification de projet</a:t>
+            </a:r>
+          </a:p>
+          <a:p>
+            <a:pPr>
+              <a:spcAft>
+                <a:spcPts val="400"/>
+              </a:spcAft>
+              <a:defRPr sz="1300">
+                <a:solidFill>
+                  <a:srgbClr val="2B2B2B"/>
+                </a:solidFill>
+                <a:latin typeface="Calibri"/>
+              </a:defRPr>
+            </a:pPr>
+          </a:p>
+          <a:p>
+            <a:pPr>
+              <a:spcAft>
+                <a:spcPts val="400"/>
+              </a:spcAft>
+              <a:defRPr sz="1300">
+                <a:solidFill>
+                  <a:srgbClr val="2B2B2B"/>
+                </a:solidFill>
+                <a:latin typeface="Calibri"/>
+              </a:defRPr>
+            </a:pPr>
+            <a:r>
+              <a:t>En mode Think Deeper</a:t>
+            </a:r>
+          </a:p>
+          <a:p>
+            <a:pPr>
+              <a:spcAft>
+                <a:spcPts val="400"/>
+              </a:spcAft>
+              <a:defRPr sz="1300">
+                <a:solidFill>
+                  <a:srgbClr val="2B2B2B"/>
+                </a:solidFill>
+                <a:latin typeface="Calibri"/>
+              </a:defRPr>
+            </a:pPr>
+            <a:r>
+              <a:t>pour meilleurs résultats</a:t>
+            </a:r>
+          </a:p>
+        </p:txBody>
+      </p:sp>
+      <p:sp>
+        <p:nvSpPr>
+          <p:cNvPr id="14" name="Rectangle 13"/>
+          <p:cNvSpPr/>
+          <p:nvPr/>
+        </p:nvSpPr>
+        <p:spPr>
+          <a:xfrm>
+            <a:off x="457200" y="6446520"/>
+            <a:ext cx="11274552" cy="13716"/>
+          </a:xfrm>
+          <a:prstGeom prst="rect">
+            <a:avLst/>
+          </a:prstGeom>
+          <a:solidFill>
+            <a:srgbClr val="00874E"/>
+          </a:solidFill>
+          <a:ln>
+            <a:noFill/>
+          </a:ln>
+          <a:effectLst/>
+        </p:spPr>
+        <p:style>
+          <a:lnRef idx="1">
+            <a:schemeClr val="accent1"/>
+          </a:lnRef>
+          <a:fillRef idx="3">
+            <a:schemeClr val="accent1"/>
+          </a:fillRef>
+          <a:effectRef idx="2">
+            <a:schemeClr val="accent1"/>
+          </a:effectRef>
+          <a:fontRef idx="minor">
+            <a:schemeClr val="lt1"/>
+          </a:fontRef>
+        </p:style>
+        <p:txBody>
+          <a:bodyPr rtlCol="0" anchor="ctr"/>
+          <a:lstStyle/>
+          <a:p>
+            <a:pPr algn="ctr"/>
+          </a:p>
+        </p:txBody>
+      </p:sp>
+      <p:sp>
+        <p:nvSpPr>
+          <p:cNvPr id="15" name="TextBox 14"/>
+          <p:cNvSpPr txBox="1"/>
+          <p:nvPr/>
+        </p:nvSpPr>
+        <p:spPr>
+          <a:xfrm>
+            <a:off x="457200" y="6537960"/>
+            <a:ext cx="5486400" cy="274320"/>
+          </a:xfrm>
+          <a:prstGeom prst="rect">
+            <a:avLst/>
+          </a:prstGeom>
+          <a:noFill/>
+        </p:spPr>
+        <p:txBody>
+          <a:bodyPr wrap="square" lIns="45720" rIns="45720" tIns="18288" bIns="18288">
+            <a:spAutoFit/>
+          </a:bodyPr>
+          <a:lstStyle/>
+          <a:p>
+            <a:pPr algn="l">
+              <a:defRPr sz="1000" b="0">
+                <a:solidFill>
+                  <a:srgbClr val="6B6B6B"/>
+                </a:solidFill>
+                <a:latin typeface="Calibri"/>
+              </a:defRPr>
+            </a:pPr>
+            <a:r>
+              <a:t>La minute Copilot</a:t>
+            </a:r>
+          </a:p>
+        </p:txBody>
+      </p:sp>
+      <p:sp>
+        <p:nvSpPr>
+          <p:cNvPr id="16" name="TextBox 15"/>
+          <p:cNvSpPr txBox="1"/>
+          <p:nvPr/>
+        </p:nvSpPr>
+        <p:spPr>
+          <a:xfrm>
+            <a:off x="10972800" y="6537960"/>
+            <a:ext cx="822960" cy="274320"/>
+          </a:xfrm>
+          <a:prstGeom prst="rect">
+            <a:avLst/>
+          </a:prstGeom>
+          <a:noFill/>
+        </p:spPr>
+        <p:txBody>
+          <a:bodyPr wrap="square" lIns="45720" rIns="45720" tIns="18288" bIns="18288">
+            <a:spAutoFit/>
+          </a:bodyPr>
+          <a:lstStyle/>
+          <a:p>
+            <a:pPr algn="r">
+              <a:defRPr sz="1000" b="0">
+                <a:solidFill>
+                  <a:srgbClr val="6B6B6B"/>
+                </a:solidFill>
+                <a:latin typeface="Calibri"/>
+              </a:defRPr>
+            </a:pPr>
+            <a:r>
+              <a:t>3</a:t>
             </a:r>
           </a:p>
         </p:txBody>
@@ -5186,7 +5766,7 @@
     <p:bg>
       <p:bgPr>
         <a:solidFill>
-          <a:srgbClr val="FFFFFF"/>
+          <a:srgbClr val="E6F0EA"/>
         </a:solidFill>
         <a:effectLst/>
       </p:bgPr>
@@ -5206,8 +5786,8 @@
         </p:nvSpPr>
         <p:spPr>
           <a:xfrm>
-            <a:off x="457200" y="274320"/>
-            <a:ext cx="10972800" cy="640080"/>
+            <a:off x="457200" y="365760"/>
+            <a:ext cx="10972800" cy="731520"/>
           </a:xfrm>
           <a:prstGeom prst="rect">
             <a:avLst/>
@@ -5215,21 +5795,21 @@
           <a:noFill/>
         </p:spPr>
         <p:txBody>
-          <a:bodyPr wrap="square">
+          <a:bodyPr wrap="square" lIns="45720" rIns="45720" tIns="18288" bIns="18288">
             <a:spAutoFit/>
           </a:bodyPr>
           <a:lstStyle/>
           <a:p>
             <a:pPr algn="l">
-              <a:defRPr sz="3200" b="1">
-                <a:solidFill>
-                  <a:srgbClr val="2B2B2B"/>
-                </a:solidFill>
-                <a:latin typeface="Calibri"/>
-              </a:defRPr>
-            </a:pPr>
-            <a:r>
-              <a:t>⚔️ Red Team / Blue Team — Se challenger soi-même</a:t>
+              <a:defRPr sz="2800" b="1">
+                <a:solidFill>
+                  <a:srgbClr val="006B3F"/>
+                </a:solidFill>
+                <a:latin typeface="Calibri"/>
+              </a:defRPr>
+            </a:pPr>
+            <a:r>
+              <a:t>Red Team / Blue Team — Se challenger soi-même</a:t>
             </a:r>
           </a:p>
         </p:txBody>
@@ -5242,8 +5822,8 @@
         </p:nvSpPr>
         <p:spPr>
           <a:xfrm>
-            <a:off x="457200" y="914400"/>
-            <a:ext cx="10972800" cy="457200"/>
+            <a:off x="457200" y="1005840"/>
+            <a:ext cx="10972800" cy="411480"/>
           </a:xfrm>
           <a:prstGeom prst="rect">
             <a:avLst/>
@@ -5251,13 +5831,13 @@
           <a:noFill/>
         </p:spPr>
         <p:txBody>
-          <a:bodyPr wrap="square">
+          <a:bodyPr wrap="square" lIns="45720" rIns="45720" tIns="18288" bIns="18288">
             <a:spAutoFit/>
           </a:bodyPr>
           <a:lstStyle/>
           <a:p>
             <a:pPr algn="l">
-              <a:defRPr sz="1800" b="0">
+              <a:defRPr sz="1500" b="0">
                 <a:solidFill>
                   <a:srgbClr val="6B6B6B"/>
                 </a:solidFill>
@@ -5272,113 +5852,25 @@
       </p:sp>
       <p:sp>
         <p:nvSpPr>
-          <p:cNvPr id="4" name="TextBox 3"/>
-          <p:cNvSpPr txBox="1"/>
-          <p:nvPr/>
-        </p:nvSpPr>
-        <p:spPr>
-          <a:xfrm>
-            <a:off x="457200" y="1554480"/>
-            <a:ext cx="10972800" cy="1371600"/>
-          </a:xfrm>
-          <a:prstGeom prst="rect">
-            <a:avLst/>
-          </a:prstGeom>
-          <a:noFill/>
-        </p:spPr>
-        <p:txBody>
-          <a:bodyPr wrap="square">
-            <a:spAutoFit/>
-          </a:bodyPr>
-          <a:lstStyle/>
-          <a:p>
-            <a:pPr>
-              <a:spcAft>
-                <a:spcPts val="400"/>
-              </a:spcAft>
-              <a:defRPr sz="1400">
-                <a:solidFill>
-                  <a:srgbClr val="2B2B2B"/>
-                </a:solidFill>
-                <a:latin typeface="Calibri"/>
-              </a:defRPr>
-            </a:pPr>
-            <a:r>
-              <a:t>• Blue Team: propose une solution ou un plan</a:t>
-            </a:r>
-          </a:p>
-          <a:p>
-            <a:pPr>
-              <a:spcAft>
-                <a:spcPts val="400"/>
-              </a:spcAft>
-              <a:defRPr sz="1400">
-                <a:solidFill>
-                  <a:srgbClr val="2B2B2B"/>
-                </a:solidFill>
-                <a:latin typeface="Calibri"/>
-              </a:defRPr>
-            </a:pPr>
-            <a:r>
-              <a:t>• Red Team: critique, cherche les failles, les risques</a:t>
-            </a:r>
-          </a:p>
-          <a:p>
-            <a:pPr>
-              <a:spcAft>
-                <a:spcPts val="400"/>
-              </a:spcAft>
-              <a:defRPr sz="1400">
-                <a:solidFill>
-                  <a:srgbClr val="2B2B2B"/>
-                </a:solidFill>
-                <a:latin typeface="Calibri"/>
-              </a:defRPr>
-            </a:pPr>
-            <a:r>
-              <a:t>• Le tout dans un seul prompt!</a:t>
-            </a:r>
-          </a:p>
-          <a:p>
-            <a:pPr>
-              <a:spcAft>
-                <a:spcPts val="400"/>
-              </a:spcAft>
-              <a:defRPr sz="1400">
-                <a:solidFill>
-                  <a:srgbClr val="2B2B2B"/>
-                </a:solidFill>
-                <a:latin typeface="Calibri"/>
-              </a:defRPr>
-            </a:pPr>
-            <a:r>
-              <a:t>• Parfait pour conformité, sécurité, décisions importantes</a:t>
-            </a:r>
-          </a:p>
-        </p:txBody>
-      </p:sp>
-      <p:sp>
-        <p:nvSpPr>
-          <p:cNvPr id="5" name="Rectangle 4"/>
+          <p:cNvPr id="4" name="Rectangle 3"/>
           <p:cNvSpPr/>
           <p:nvPr/>
         </p:nvSpPr>
         <p:spPr>
           <a:xfrm>
-            <a:off x="457200" y="3017520"/>
-            <a:ext cx="3383280" cy="3657600"/>
+            <a:off x="457200" y="1508760"/>
+            <a:ext cx="11274552" cy="18288"/>
           </a:xfrm>
           <a:prstGeom prst="rect">
             <a:avLst/>
           </a:prstGeom>
           <a:solidFill>
-            <a:srgbClr val="FFFFFF"/>
+            <a:srgbClr val="00874E"/>
           </a:solidFill>
           <a:ln>
-            <a:solidFill>
-              <a:srgbClr val="E0E0E0"/>
-            </a:solidFill>
+            <a:noFill/>
           </a:ln>
+          <a:effectLst/>
         </p:spPr>
         <p:style>
           <a:lnRef idx="1">
@@ -5404,50 +5896,14 @@
       </p:sp>
       <p:sp>
         <p:nvSpPr>
-          <p:cNvPr id="6" name="TextBox 5"/>
+          <p:cNvPr id="5" name="TextBox 4"/>
           <p:cNvSpPr txBox="1"/>
           <p:nvPr/>
         </p:nvSpPr>
         <p:spPr>
           <a:xfrm>
-            <a:off x="731520" y="3200400"/>
-            <a:ext cx="2834640" cy="457200"/>
-          </a:xfrm>
-          <a:prstGeom prst="rect">
-            <a:avLst/>
-          </a:prstGeom>
-          <a:noFill/>
-        </p:spPr>
-        <p:txBody>
-          <a:bodyPr wrap="square">
-            <a:spAutoFit/>
-          </a:bodyPr>
-          <a:lstStyle/>
-          <a:p>
-            <a:pPr algn="l">
-              <a:defRPr sz="1800" b="1">
-                <a:solidFill>
-                  <a:srgbClr val="0078D4"/>
-                </a:solidFill>
-                <a:latin typeface="Calibri"/>
-              </a:defRPr>
-            </a:pPr>
-            <a:r>
-              <a:t>🔵 Blue Team</a:t>
-            </a:r>
-          </a:p>
-        </p:txBody>
-      </p:sp>
-      <p:sp>
-        <p:nvSpPr>
-          <p:cNvPr id="7" name="TextBox 6"/>
-          <p:cNvSpPr txBox="1"/>
-          <p:nvPr/>
-        </p:nvSpPr>
-        <p:spPr>
-          <a:xfrm>
-            <a:off x="731520" y="3657600"/>
-            <a:ext cx="2834640" cy="2743200"/>
+            <a:off x="457200" y="1737360"/>
+            <a:ext cx="10972800" cy="1188720"/>
           </a:xfrm>
           <a:prstGeom prst="rect">
             <a:avLst/>
@@ -5464,7 +5920,7 @@
               <a:spcAft>
                 <a:spcPts val="400"/>
               </a:spcAft>
-              <a:defRPr sz="1300">
+              <a:defRPr sz="1400">
                 <a:solidFill>
                   <a:srgbClr val="2B2B2B"/>
                 </a:solidFill>
@@ -5472,7 +5928,7 @@
               </a:defRPr>
             </a:pPr>
             <a:r>
-              <a:t>Propose la meilleure</a:t>
+              <a:t>• Blue Team: propose une solution ou un plan</a:t>
             </a:r>
           </a:p>
           <a:p>
@@ -5480,7 +5936,7 @@
               <a:spcAft>
                 <a:spcPts val="400"/>
               </a:spcAft>
-              <a:defRPr sz="1300">
+              <a:defRPr sz="1400">
                 <a:solidFill>
                   <a:srgbClr val="2B2B2B"/>
                 </a:solidFill>
@@ -5488,7 +5944,7 @@
               </a:defRPr>
             </a:pPr>
             <a:r>
-              <a:t>solution</a:t>
+              <a:t>• Red Team: critique, cherche les failles, les risques</a:t>
             </a:r>
           </a:p>
           <a:p>
@@ -5496,20 +5952,23 @@
               <a:spcAft>
                 <a:spcPts val="400"/>
               </a:spcAft>
-              <a:defRPr sz="1300">
+              <a:defRPr sz="1400">
                 <a:solidFill>
                   <a:srgbClr val="2B2B2B"/>
                 </a:solidFill>
                 <a:latin typeface="Calibri"/>
               </a:defRPr>
             </a:pPr>
+            <a:r>
+              <a:t>• Le tout dans un seul prompt!</a:t>
+            </a:r>
           </a:p>
           <a:p>
             <a:pPr>
               <a:spcAft>
                 <a:spcPts val="400"/>
               </a:spcAft>
-              <a:defRPr sz="1300">
+              <a:defRPr sz="1400">
                 <a:solidFill>
                   <a:srgbClr val="2B2B2B"/>
                 </a:solidFill>
@@ -5517,53 +5976,21 @@
               </a:defRPr>
             </a:pPr>
             <a:r>
-              <a:t>Optimiste</a:t>
-            </a:r>
-          </a:p>
-          <a:p>
-            <a:pPr>
-              <a:spcAft>
-                <a:spcPts val="400"/>
-              </a:spcAft>
-              <a:defRPr sz="1300">
-                <a:solidFill>
-                  <a:srgbClr val="2B2B2B"/>
-                </a:solidFill>
-                <a:latin typeface="Calibri"/>
-              </a:defRPr>
-            </a:pPr>
-            <a:r>
-              <a:t> centré sur les</a:t>
-            </a:r>
-          </a:p>
-          <a:p>
-            <a:pPr>
-              <a:spcAft>
-                <a:spcPts val="400"/>
-              </a:spcAft>
-              <a:defRPr sz="1300">
-                <a:solidFill>
-                  <a:srgbClr val="2B2B2B"/>
-                </a:solidFill>
-                <a:latin typeface="Calibri"/>
-              </a:defRPr>
-            </a:pPr>
-            <a:r>
-              <a:t>opportunités</a:t>
-            </a:r>
-          </a:p>
-        </p:txBody>
-      </p:sp>
-      <p:sp>
-        <p:nvSpPr>
-          <p:cNvPr id="8" name="Rectangle 7"/>
+              <a:t>• Parfait pour conformité, sécurité, décisions importantes</a:t>
+            </a:r>
+          </a:p>
+        </p:txBody>
+      </p:sp>
+      <p:sp>
+        <p:nvSpPr>
+          <p:cNvPr id="6" name="Rectangle 5"/>
           <p:cNvSpPr/>
           <p:nvPr/>
         </p:nvSpPr>
         <p:spPr>
           <a:xfrm>
-            <a:off x="4114800" y="3017520"/>
-            <a:ext cx="3383280" cy="3657600"/>
+            <a:off x="457200" y="2926080"/>
+            <a:ext cx="3383280" cy="3291840"/>
           </a:xfrm>
           <a:prstGeom prst="rect">
             <a:avLst/>
@@ -5576,6 +6003,7 @@
               <a:srgbClr val="E0E0E0"/>
             </a:solidFill>
           </a:ln>
+          <a:effectLst/>
         </p:spPr>
         <p:style>
           <a:lnRef idx="1">
@@ -5599,6 +6027,66 @@
           </a:p>
         </p:txBody>
       </p:sp>
+      <p:pic>
+        <p:nvPicPr>
+          <p:cNvPr id="7" name="Picture 6" descr="shield_00874E_30.png"/>
+          <p:cNvPicPr>
+            <a:picLocks noChangeAspect="1"/>
+          </p:cNvPicPr>
+          <p:nvPr/>
+        </p:nvPicPr>
+        <p:blipFill>
+          <a:blip r:embed="rId3"/>
+          <a:stretch>
+            <a:fillRect/>
+          </a:stretch>
+        </p:blipFill>
+        <p:spPr>
+          <a:xfrm>
+            <a:off x="713232" y="3090672"/>
+            <a:ext cx="292608" cy="292608"/>
+          </a:xfrm>
+          <a:prstGeom prst="rect">
+            <a:avLst/>
+          </a:prstGeom>
+        </p:spPr>
+      </p:pic>
+      <p:sp>
+        <p:nvSpPr>
+          <p:cNvPr id="8" name="TextBox 7"/>
+          <p:cNvSpPr txBox="1"/>
+          <p:nvPr/>
+        </p:nvSpPr>
+        <p:spPr>
+          <a:xfrm>
+            <a:off x="1115568" y="3108960"/>
+            <a:ext cx="2542032" cy="457200"/>
+          </a:xfrm>
+          <a:prstGeom prst="rect">
+            <a:avLst/>
+          </a:prstGeom>
+          <a:noFill/>
+        </p:spPr>
+        <p:txBody>
+          <a:bodyPr wrap="square" lIns="45720" rIns="45720" tIns="18288" bIns="18288">
+            <a:spAutoFit/>
+          </a:bodyPr>
+          <a:lstStyle/>
+          <a:p>
+            <a:pPr algn="l">
+              <a:defRPr sz="1700" b="1">
+                <a:solidFill>
+                  <a:srgbClr val="00874E"/>
+                </a:solidFill>
+                <a:latin typeface="Calibri"/>
+              </a:defRPr>
+            </a:pPr>
+            <a:r>
+              <a:t>Blue Team</a:t>
+            </a:r>
+          </a:p>
+        </p:txBody>
+      </p:sp>
       <p:sp>
         <p:nvSpPr>
           <p:cNvPr id="9" name="TextBox 8"/>
@@ -5607,44 +6095,8 @@
         </p:nvSpPr>
         <p:spPr>
           <a:xfrm>
-            <a:off x="4389120" y="3200400"/>
-            <a:ext cx="2834640" cy="457200"/>
-          </a:xfrm>
-          <a:prstGeom prst="rect">
-            <a:avLst/>
-          </a:prstGeom>
-          <a:noFill/>
-        </p:spPr>
-        <p:txBody>
-          <a:bodyPr wrap="square">
-            <a:spAutoFit/>
-          </a:bodyPr>
-          <a:lstStyle/>
-          <a:p>
-            <a:pPr algn="l">
-              <a:defRPr sz="1800" b="1">
-                <a:solidFill>
-                  <a:srgbClr val="EF4444"/>
-                </a:solidFill>
-                <a:latin typeface="Calibri"/>
-              </a:defRPr>
-            </a:pPr>
-            <a:r>
-              <a:t>🔴 Red Team</a:t>
-            </a:r>
-          </a:p>
-        </p:txBody>
-      </p:sp>
-      <p:sp>
-        <p:nvSpPr>
-          <p:cNvPr id="10" name="TextBox 9"/>
-          <p:cNvSpPr txBox="1"/>
-          <p:nvPr/>
-        </p:nvSpPr>
-        <p:spPr>
-          <a:xfrm>
-            <a:off x="4389120" y="3657600"/>
-            <a:ext cx="2834640" cy="2743200"/>
+            <a:off x="731520" y="3703320"/>
+            <a:ext cx="2834640" cy="2331720"/>
           </a:xfrm>
           <a:prstGeom prst="rect">
             <a:avLst/>
@@ -5669,7 +6121,7 @@
               </a:defRPr>
             </a:pPr>
             <a:r>
-              <a:t>Cherche les failles</a:t>
+              <a:t>Propose la meilleure</a:t>
             </a:r>
           </a:p>
           <a:p>
@@ -5685,7 +6137,7 @@
               </a:defRPr>
             </a:pPr>
             <a:r>
-              <a:t>et les risques</a:t>
+              <a:t>solution</a:t>
             </a:r>
           </a:p>
           <a:p>
@@ -5714,7 +6166,7 @@
               </a:defRPr>
             </a:pPr>
             <a:r>
-              <a:t>Pessimiste</a:t>
+              <a:t>Optimiste</a:t>
             </a:r>
           </a:p>
           <a:p>
@@ -5730,7 +6182,7 @@
               </a:defRPr>
             </a:pPr>
             <a:r>
-              <a:t> centré sur la</a:t>
+              <a:t>centré sur les</a:t>
             </a:r>
           </a:p>
           <a:p>
@@ -5746,21 +6198,21 @@
               </a:defRPr>
             </a:pPr>
             <a:r>
-              <a:t>sécurité</a:t>
-            </a:r>
-          </a:p>
-        </p:txBody>
-      </p:sp>
-      <p:sp>
-        <p:nvSpPr>
-          <p:cNvPr id="11" name="Rectangle 10"/>
+              <a:t>opportunités</a:t>
+            </a:r>
+          </a:p>
+        </p:txBody>
+      </p:sp>
+      <p:sp>
+        <p:nvSpPr>
+          <p:cNvPr id="10" name="Rectangle 9"/>
           <p:cNvSpPr/>
           <p:nvPr/>
         </p:nvSpPr>
         <p:spPr>
           <a:xfrm>
-            <a:off x="7772400" y="3017520"/>
-            <a:ext cx="3383280" cy="3657600"/>
+            <a:off x="4114800" y="2926080"/>
+            <a:ext cx="3383280" cy="3291840"/>
           </a:xfrm>
           <a:prstGeom prst="rect">
             <a:avLst/>
@@ -5773,6 +6225,7 @@
               <a:srgbClr val="E0E0E0"/>
             </a:solidFill>
           </a:ln>
+          <a:effectLst/>
         </p:spPr>
         <p:style>
           <a:lnRef idx="1">
@@ -5796,6 +6249,30 @@
           </a:p>
         </p:txBody>
       </p:sp>
+      <p:pic>
+        <p:nvPicPr>
+          <p:cNvPr id="11" name="Picture 10" descr="swords_EF4444_30.png"/>
+          <p:cNvPicPr>
+            <a:picLocks noChangeAspect="1"/>
+          </p:cNvPicPr>
+          <p:nvPr/>
+        </p:nvPicPr>
+        <p:blipFill>
+          <a:blip r:embed="rId4"/>
+          <a:stretch>
+            <a:fillRect/>
+          </a:stretch>
+        </p:blipFill>
+        <p:spPr>
+          <a:xfrm>
+            <a:off x="4370832" y="3090672"/>
+            <a:ext cx="292608" cy="292608"/>
+          </a:xfrm>
+          <a:prstGeom prst="rect">
+            <a:avLst/>
+          </a:prstGeom>
+        </p:spPr>
+      </p:pic>
       <p:sp>
         <p:nvSpPr>
           <p:cNvPr id="12" name="TextBox 11"/>
@@ -5804,8 +6281,8 @@
         </p:nvSpPr>
         <p:spPr>
           <a:xfrm>
-            <a:off x="8046720" y="3200400"/>
-            <a:ext cx="2834640" cy="457200"/>
+            <a:off x="4773168" y="3108960"/>
+            <a:ext cx="2542031" cy="457200"/>
           </a:xfrm>
           <a:prstGeom prst="rect">
             <a:avLst/>
@@ -5813,21 +6290,21 @@
           <a:noFill/>
         </p:spPr>
         <p:txBody>
-          <a:bodyPr wrap="square">
+          <a:bodyPr wrap="square" lIns="45720" rIns="45720" tIns="18288" bIns="18288">
             <a:spAutoFit/>
           </a:bodyPr>
           <a:lstStyle/>
           <a:p>
             <a:pPr algn="l">
-              <a:defRPr sz="1800" b="1">
-                <a:solidFill>
-                  <a:srgbClr val="F59E0B"/>
-                </a:solidFill>
-                <a:latin typeface="Calibri"/>
-              </a:defRPr>
-            </a:pPr>
-            <a:r>
-              <a:t>⚡ Résultat</a:t>
+              <a:defRPr sz="1700" b="1">
+                <a:solidFill>
+                  <a:srgbClr val="EF4444"/>
+                </a:solidFill>
+                <a:latin typeface="Calibri"/>
+              </a:defRPr>
+            </a:pPr>
+            <a:r>
+              <a:t>Red Team</a:t>
             </a:r>
           </a:p>
         </p:txBody>
@@ -5840,8 +6317,8 @@
         </p:nvSpPr>
         <p:spPr>
           <a:xfrm>
-            <a:off x="8046720" y="3657600"/>
-            <a:ext cx="2834640" cy="2743200"/>
+            <a:off x="4389120" y="3703320"/>
+            <a:ext cx="2834640" cy="2331720"/>
           </a:xfrm>
           <a:prstGeom prst="rect">
             <a:avLst/>
@@ -5866,7 +6343,7 @@
               </a:defRPr>
             </a:pPr>
             <a:r>
-              <a:t>Les deux visions</a:t>
+              <a:t>Cherche les failles</a:t>
             </a:r>
           </a:p>
           <a:p>
@@ -5882,7 +6359,7 @@
               </a:defRPr>
             </a:pPr>
             <a:r>
-              <a:t>combinées donnent</a:t>
+              <a:t>et les risques</a:t>
             </a:r>
           </a:p>
           <a:p>
@@ -5897,9 +6374,6 @@
                 <a:latin typeface="Calibri"/>
               </a:defRPr>
             </a:pPr>
-            <a:r>
-              <a:t>une décision</a:t>
-            </a:r>
           </a:p>
           <a:p>
             <a:pPr>
@@ -5914,7 +6388,7 @@
               </a:defRPr>
             </a:pPr>
             <a:r>
-              <a:t>éclairée et robuste</a:t>
+              <a:t>Pessimiste</a:t>
             </a:r>
           </a:p>
           <a:p>
@@ -5929,6 +6403,9 @@
                 <a:latin typeface="Calibri"/>
               </a:defRPr>
             </a:pPr>
+            <a:r>
+              <a:t>centré sur la</a:t>
+            </a:r>
           </a:p>
           <a:p>
             <a:pPr>
@@ -5943,9 +6420,138 @@
               </a:defRPr>
             </a:pPr>
             <a:r>
-              <a:t>💰 Indispensable en</a:t>
-            </a:r>
-          </a:p>
+              <a:t>sécurité</a:t>
+            </a:r>
+          </a:p>
+        </p:txBody>
+      </p:sp>
+      <p:sp>
+        <p:nvSpPr>
+          <p:cNvPr id="14" name="Rectangle 13"/>
+          <p:cNvSpPr/>
+          <p:nvPr/>
+        </p:nvSpPr>
+        <p:spPr>
+          <a:xfrm>
+            <a:off x="7772400" y="2926080"/>
+            <a:ext cx="3383280" cy="3291840"/>
+          </a:xfrm>
+          <a:prstGeom prst="rect">
+            <a:avLst/>
+          </a:prstGeom>
+          <a:solidFill>
+            <a:srgbClr val="FFFFFF"/>
+          </a:solidFill>
+          <a:ln>
+            <a:solidFill>
+              <a:srgbClr val="E0E0E0"/>
+            </a:solidFill>
+          </a:ln>
+          <a:effectLst/>
+        </p:spPr>
+        <p:style>
+          <a:lnRef idx="1">
+            <a:schemeClr val="accent1"/>
+          </a:lnRef>
+          <a:fillRef idx="3">
+            <a:schemeClr val="accent1"/>
+          </a:fillRef>
+          <a:effectRef idx="2">
+            <a:schemeClr val="accent1"/>
+          </a:effectRef>
+          <a:fontRef idx="minor">
+            <a:schemeClr val="lt1"/>
+          </a:fontRef>
+        </p:style>
+        <p:txBody>
+          <a:bodyPr rtlCol="0" anchor="ctr"/>
+          <a:lstStyle/>
+          <a:p>
+            <a:pPr algn="ctr"/>
+          </a:p>
+        </p:txBody>
+      </p:sp>
+      <p:pic>
+        <p:nvPicPr>
+          <p:cNvPr id="15" name="Picture 14" descr="circle-check_F59E0B_30.png"/>
+          <p:cNvPicPr>
+            <a:picLocks noChangeAspect="1"/>
+          </p:cNvPicPr>
+          <p:nvPr/>
+        </p:nvPicPr>
+        <p:blipFill>
+          <a:blip r:embed="rId5"/>
+          <a:stretch>
+            <a:fillRect/>
+          </a:stretch>
+        </p:blipFill>
+        <p:spPr>
+          <a:xfrm>
+            <a:off x="8028431" y="3090672"/>
+            <a:ext cx="292608" cy="292608"/>
+          </a:xfrm>
+          <a:prstGeom prst="rect">
+            <a:avLst/>
+          </a:prstGeom>
+        </p:spPr>
+      </p:pic>
+      <p:sp>
+        <p:nvSpPr>
+          <p:cNvPr id="16" name="TextBox 15"/>
+          <p:cNvSpPr txBox="1"/>
+          <p:nvPr/>
+        </p:nvSpPr>
+        <p:spPr>
+          <a:xfrm>
+            <a:off x="8430767" y="3108960"/>
+            <a:ext cx="2542032" cy="457200"/>
+          </a:xfrm>
+          <a:prstGeom prst="rect">
+            <a:avLst/>
+          </a:prstGeom>
+          <a:noFill/>
+        </p:spPr>
+        <p:txBody>
+          <a:bodyPr wrap="square" lIns="45720" rIns="45720" tIns="18288" bIns="18288">
+            <a:spAutoFit/>
+          </a:bodyPr>
+          <a:lstStyle/>
+          <a:p>
+            <a:pPr algn="l">
+              <a:defRPr sz="1700" b="1">
+                <a:solidFill>
+                  <a:srgbClr val="F59E0B"/>
+                </a:solidFill>
+                <a:latin typeface="Calibri"/>
+              </a:defRPr>
+            </a:pPr>
+            <a:r>
+              <a:t>Résultat</a:t>
+            </a:r>
+          </a:p>
+        </p:txBody>
+      </p:sp>
+      <p:sp>
+        <p:nvSpPr>
+          <p:cNvPr id="17" name="TextBox 16"/>
+          <p:cNvSpPr txBox="1"/>
+          <p:nvPr/>
+        </p:nvSpPr>
+        <p:spPr>
+          <a:xfrm>
+            <a:off x="8046720" y="3703320"/>
+            <a:ext cx="2834640" cy="2331720"/>
+          </a:xfrm>
+          <a:prstGeom prst="rect">
+            <a:avLst/>
+          </a:prstGeom>
+          <a:noFill/>
+        </p:spPr>
+        <p:txBody>
+          <a:bodyPr wrap="square">
+            <a:spAutoFit/>
+          </a:bodyPr>
+          <a:lstStyle/>
           <a:p>
             <a:pPr>
               <a:spcAft>
@@ -5959,7 +6565,216 @@
               </a:defRPr>
             </a:pPr>
             <a:r>
-              <a:t>   finance!</a:t>
+              <a:t>Les deux visions</a:t>
+            </a:r>
+          </a:p>
+          <a:p>
+            <a:pPr>
+              <a:spcAft>
+                <a:spcPts val="400"/>
+              </a:spcAft>
+              <a:defRPr sz="1300">
+                <a:solidFill>
+                  <a:srgbClr val="2B2B2B"/>
+                </a:solidFill>
+                <a:latin typeface="Calibri"/>
+              </a:defRPr>
+            </a:pPr>
+            <a:r>
+              <a:t>combinées donnent</a:t>
+            </a:r>
+          </a:p>
+          <a:p>
+            <a:pPr>
+              <a:spcAft>
+                <a:spcPts val="400"/>
+              </a:spcAft>
+              <a:defRPr sz="1300">
+                <a:solidFill>
+                  <a:srgbClr val="2B2B2B"/>
+                </a:solidFill>
+                <a:latin typeface="Calibri"/>
+              </a:defRPr>
+            </a:pPr>
+            <a:r>
+              <a:t>une décision</a:t>
+            </a:r>
+          </a:p>
+          <a:p>
+            <a:pPr>
+              <a:spcAft>
+                <a:spcPts val="400"/>
+              </a:spcAft>
+              <a:defRPr sz="1300">
+                <a:solidFill>
+                  <a:srgbClr val="2B2B2B"/>
+                </a:solidFill>
+                <a:latin typeface="Calibri"/>
+              </a:defRPr>
+            </a:pPr>
+            <a:r>
+              <a:t>éclairée et robuste</a:t>
+            </a:r>
+          </a:p>
+          <a:p>
+            <a:pPr>
+              <a:spcAft>
+                <a:spcPts val="400"/>
+              </a:spcAft>
+              <a:defRPr sz="1300">
+                <a:solidFill>
+                  <a:srgbClr val="2B2B2B"/>
+                </a:solidFill>
+                <a:latin typeface="Calibri"/>
+              </a:defRPr>
+            </a:pPr>
+          </a:p>
+          <a:p>
+            <a:pPr>
+              <a:spcAft>
+                <a:spcPts val="400"/>
+              </a:spcAft>
+              <a:defRPr sz="1300">
+                <a:solidFill>
+                  <a:srgbClr val="2B2B2B"/>
+                </a:solidFill>
+                <a:latin typeface="Calibri"/>
+              </a:defRPr>
+            </a:pPr>
+            <a:r>
+              <a:t>Indispensable en</a:t>
+            </a:r>
+          </a:p>
+          <a:p>
+            <a:pPr>
+              <a:spcAft>
+                <a:spcPts val="400"/>
+              </a:spcAft>
+              <a:defRPr sz="1300">
+                <a:solidFill>
+                  <a:srgbClr val="2B2B2B"/>
+                </a:solidFill>
+                <a:latin typeface="Calibri"/>
+              </a:defRPr>
+            </a:pPr>
+            <a:r>
+              <a:t>finance!</a:t>
+            </a:r>
+          </a:p>
+        </p:txBody>
+      </p:sp>
+      <p:sp>
+        <p:nvSpPr>
+          <p:cNvPr id="18" name="Rectangle 17"/>
+          <p:cNvSpPr/>
+          <p:nvPr/>
+        </p:nvSpPr>
+        <p:spPr>
+          <a:xfrm>
+            <a:off x="457200" y="6446520"/>
+            <a:ext cx="11274552" cy="13716"/>
+          </a:xfrm>
+          <a:prstGeom prst="rect">
+            <a:avLst/>
+          </a:prstGeom>
+          <a:solidFill>
+            <a:srgbClr val="00874E"/>
+          </a:solidFill>
+          <a:ln>
+            <a:noFill/>
+          </a:ln>
+          <a:effectLst/>
+        </p:spPr>
+        <p:style>
+          <a:lnRef idx="1">
+            <a:schemeClr val="accent1"/>
+          </a:lnRef>
+          <a:fillRef idx="3">
+            <a:schemeClr val="accent1"/>
+          </a:fillRef>
+          <a:effectRef idx="2">
+            <a:schemeClr val="accent1"/>
+          </a:effectRef>
+          <a:fontRef idx="minor">
+            <a:schemeClr val="lt1"/>
+          </a:fontRef>
+        </p:style>
+        <p:txBody>
+          <a:bodyPr rtlCol="0" anchor="ctr"/>
+          <a:lstStyle/>
+          <a:p>
+            <a:pPr algn="ctr"/>
+          </a:p>
+        </p:txBody>
+      </p:sp>
+      <p:sp>
+        <p:nvSpPr>
+          <p:cNvPr id="19" name="TextBox 18"/>
+          <p:cNvSpPr txBox="1"/>
+          <p:nvPr/>
+        </p:nvSpPr>
+        <p:spPr>
+          <a:xfrm>
+            <a:off x="457200" y="6537960"/>
+            <a:ext cx="5486400" cy="274320"/>
+          </a:xfrm>
+          <a:prstGeom prst="rect">
+            <a:avLst/>
+          </a:prstGeom>
+          <a:noFill/>
+        </p:spPr>
+        <p:txBody>
+          <a:bodyPr wrap="square" lIns="45720" rIns="45720" tIns="18288" bIns="18288">
+            <a:spAutoFit/>
+          </a:bodyPr>
+          <a:lstStyle/>
+          <a:p>
+            <a:pPr algn="l">
+              <a:defRPr sz="1000" b="0">
+                <a:solidFill>
+                  <a:srgbClr val="6B6B6B"/>
+                </a:solidFill>
+                <a:latin typeface="Calibri"/>
+              </a:defRPr>
+            </a:pPr>
+            <a:r>
+              <a:t>La minute Copilot</a:t>
+            </a:r>
+          </a:p>
+        </p:txBody>
+      </p:sp>
+      <p:sp>
+        <p:nvSpPr>
+          <p:cNvPr id="20" name="TextBox 19"/>
+          <p:cNvSpPr txBox="1"/>
+          <p:nvPr/>
+        </p:nvSpPr>
+        <p:spPr>
+          <a:xfrm>
+            <a:off x="10972800" y="6537960"/>
+            <a:ext cx="822960" cy="274320"/>
+          </a:xfrm>
+          <a:prstGeom prst="rect">
+            <a:avLst/>
+          </a:prstGeom>
+          <a:noFill/>
+        </p:spPr>
+        <p:txBody>
+          <a:bodyPr wrap="square" lIns="45720" rIns="45720" tIns="18288" bIns="18288">
+            <a:spAutoFit/>
+          </a:bodyPr>
+          <a:lstStyle/>
+          <a:p>
+            <a:pPr algn="r">
+              <a:defRPr sz="1000" b="0">
+                <a:solidFill>
+                  <a:srgbClr val="6B6B6B"/>
+                </a:solidFill>
+                <a:latin typeface="Calibri"/>
+              </a:defRPr>
+            </a:pPr>
+            <a:r>
+              <a:t>4</a:t>
             </a:r>
           </a:p>
         </p:txBody>
@@ -5978,7 +6793,7 @@
     <p:bg>
       <p:bgPr>
         <a:solidFill>
-          <a:srgbClr val="F0F4F8"/>
+          <a:srgbClr val="E6F0EA"/>
         </a:solidFill>
         <a:effectLst/>
       </p:bgPr>
@@ -5998,8 +6813,8 @@
         </p:nvSpPr>
         <p:spPr>
           <a:xfrm>
-            <a:off x="457200" y="274320"/>
-            <a:ext cx="10972800" cy="640080"/>
+            <a:off x="457200" y="365760"/>
+            <a:ext cx="10972800" cy="731520"/>
           </a:xfrm>
           <a:prstGeom prst="rect">
             <a:avLst/>
@@ -6007,21 +6822,21 @@
           <a:noFill/>
         </p:spPr>
         <p:txBody>
-          <a:bodyPr wrap="square">
+          <a:bodyPr wrap="square" lIns="45720" rIns="45720" tIns="18288" bIns="18288">
             <a:spAutoFit/>
           </a:bodyPr>
           <a:lstStyle/>
           <a:p>
             <a:pPr algn="l">
-              <a:defRPr sz="3200" b="1">
-                <a:solidFill>
-                  <a:srgbClr val="2B2B2B"/>
-                </a:solidFill>
-                <a:latin typeface="Calibri"/>
-              </a:defRPr>
-            </a:pPr>
-            <a:r>
-              <a:t>💡 Exemple complet — Red/Blue Team dans Outlook</a:t>
+              <a:defRPr sz="2800" b="1">
+                <a:solidFill>
+                  <a:srgbClr val="006B3F"/>
+                </a:solidFill>
+                <a:latin typeface="Calibri"/>
+              </a:defRPr>
+            </a:pPr>
+            <a:r>
+              <a:t>Exemple complet — Red/Blue Team dans Outlook</a:t>
             </a:r>
           </a:p>
         </p:txBody>
@@ -6034,20 +6849,19 @@
         </p:nvSpPr>
         <p:spPr>
           <a:xfrm>
-            <a:off x="457200" y="1188720"/>
-            <a:ext cx="5212080" cy="5029200"/>
+            <a:off x="457200" y="1234440"/>
+            <a:ext cx="11274552" cy="18288"/>
           </a:xfrm>
           <a:prstGeom prst="rect">
             <a:avLst/>
           </a:prstGeom>
           <a:solidFill>
-            <a:srgbClr val="FFFFFF"/>
+            <a:srgbClr val="00874E"/>
           </a:solidFill>
           <a:ln>
-            <a:solidFill>
-              <a:srgbClr val="E0E0E0"/>
-            </a:solidFill>
+            <a:noFill/>
           </a:ln>
+          <a:effectLst/>
         </p:spPr>
         <p:style>
           <a:lnRef idx="1">
@@ -6073,291 +6887,14 @@
       </p:sp>
       <p:sp>
         <p:nvSpPr>
-          <p:cNvPr id="4" name="TextBox 3"/>
-          <p:cNvSpPr txBox="1"/>
-          <p:nvPr/>
-        </p:nvSpPr>
-        <p:spPr>
-          <a:xfrm>
-            <a:off x="731520" y="1371600"/>
-            <a:ext cx="4663440" cy="457200"/>
-          </a:xfrm>
-          <a:prstGeom prst="rect">
-            <a:avLst/>
-          </a:prstGeom>
-          <a:noFill/>
-        </p:spPr>
-        <p:txBody>
-          <a:bodyPr wrap="square">
-            <a:spAutoFit/>
-          </a:bodyPr>
-          <a:lstStyle/>
-          <a:p>
-            <a:pPr algn="l">
-              <a:defRPr sz="1800" b="1">
-                <a:solidFill>
-                  <a:srgbClr val="0078D4"/>
-                </a:solidFill>
-                <a:latin typeface="Calibri"/>
-              </a:defRPr>
-            </a:pPr>
-            <a:r>
-              <a:t>📝 Le prompt complet</a:t>
-            </a:r>
-          </a:p>
-        </p:txBody>
-      </p:sp>
-      <p:sp>
-        <p:nvSpPr>
-          <p:cNvPr id="5" name="TextBox 4"/>
-          <p:cNvSpPr txBox="1"/>
-          <p:nvPr/>
-        </p:nvSpPr>
-        <p:spPr>
-          <a:xfrm>
-            <a:off x="731520" y="1828800"/>
-            <a:ext cx="4663440" cy="4114800"/>
-          </a:xfrm>
-          <a:prstGeom prst="rect">
-            <a:avLst/>
-          </a:prstGeom>
-          <a:noFill/>
-        </p:spPr>
-        <p:txBody>
-          <a:bodyPr wrap="square">
-            <a:spAutoFit/>
-          </a:bodyPr>
-          <a:lstStyle/>
-          <a:p>
-            <a:pPr>
-              <a:spcAft>
-                <a:spcPts val="400"/>
-              </a:spcAft>
-              <a:defRPr sz="1300">
-                <a:solidFill>
-                  <a:srgbClr val="2B2B2B"/>
-                </a:solidFill>
-                <a:latin typeface="Calibri"/>
-              </a:defRPr>
-            </a:pPr>
-            <a:r>
-              <a:t>«En tant que chef de projet</a:t>
-            </a:r>
-          </a:p>
-          <a:p>
-            <a:pPr>
-              <a:spcAft>
-                <a:spcPts val="400"/>
-              </a:spcAft>
-              <a:defRPr sz="1300">
-                <a:solidFill>
-                  <a:srgbClr val="2B2B2B"/>
-                </a:solidFill>
-                <a:latin typeface="Calibri"/>
-              </a:defRPr>
-            </a:pPr>
-            <a:r>
-              <a:t>senior, analyse étape par</a:t>
-            </a:r>
-          </a:p>
-          <a:p>
-            <a:pPr>
-              <a:spcAft>
-                <a:spcPts val="400"/>
-              </a:spcAft>
-              <a:defRPr sz="1300">
-                <a:solidFill>
-                  <a:srgbClr val="2B2B2B"/>
-                </a:solidFill>
-                <a:latin typeface="Calibri"/>
-              </a:defRPr>
-            </a:pPr>
-            <a:r>
-              <a:t>étape si nous devons</a:t>
-            </a:r>
-          </a:p>
-          <a:p>
-            <a:pPr>
-              <a:spcAft>
-                <a:spcPts val="400"/>
-              </a:spcAft>
-              <a:defRPr sz="1300">
-                <a:solidFill>
-                  <a:srgbClr val="2B2B2B"/>
-                </a:solidFill>
-                <a:latin typeface="Calibri"/>
-              </a:defRPr>
-            </a:pPr>
-            <a:r>
-              <a:t>approuver ce budget.</a:t>
-            </a:r>
-          </a:p>
-          <a:p>
-            <a:pPr>
-              <a:spcAft>
-                <a:spcPts val="400"/>
-              </a:spcAft>
-              <a:defRPr sz="1300">
-                <a:solidFill>
-                  <a:srgbClr val="2B2B2B"/>
-                </a:solidFill>
-                <a:latin typeface="Calibri"/>
-              </a:defRPr>
-            </a:pPr>
-          </a:p>
-          <a:p>
-            <a:pPr>
-              <a:spcAft>
-                <a:spcPts val="400"/>
-              </a:spcAft>
-              <a:defRPr sz="1300">
-                <a:solidFill>
-                  <a:srgbClr val="2B2B2B"/>
-                </a:solidFill>
-                <a:latin typeface="Calibri"/>
-              </a:defRPr>
-            </a:pPr>
-            <a:r>
-              <a:t>Explore 2 scénarios:</a:t>
-            </a:r>
-          </a:p>
-          <a:p>
-            <a:pPr>
-              <a:spcAft>
-                <a:spcPts val="400"/>
-              </a:spcAft>
-              <a:defRPr sz="1300">
-                <a:solidFill>
-                  <a:srgbClr val="2B2B2B"/>
-                </a:solidFill>
-                <a:latin typeface="Calibri"/>
-              </a:defRPr>
-            </a:pPr>
-            <a:r>
-              <a:t>  A) Approuver tel quel</a:t>
-            </a:r>
-          </a:p>
-          <a:p>
-            <a:pPr>
-              <a:spcAft>
-                <a:spcPts val="400"/>
-              </a:spcAft>
-              <a:defRPr sz="1300">
-                <a:solidFill>
-                  <a:srgbClr val="2B2B2B"/>
-                </a:solidFill>
-                <a:latin typeface="Calibri"/>
-              </a:defRPr>
-            </a:pPr>
-            <a:r>
-              <a:t>  B) Demander des</a:t>
-            </a:r>
-          </a:p>
-          <a:p>
-            <a:pPr>
-              <a:spcAft>
-                <a:spcPts val="400"/>
-              </a:spcAft>
-              <a:defRPr sz="1300">
-                <a:solidFill>
-                  <a:srgbClr val="2B2B2B"/>
-                </a:solidFill>
-                <a:latin typeface="Calibri"/>
-              </a:defRPr>
-            </a:pPr>
-            <a:r>
-              <a:t>     modifications</a:t>
-            </a:r>
-          </a:p>
-          <a:p>
-            <a:pPr>
-              <a:spcAft>
-                <a:spcPts val="400"/>
-              </a:spcAft>
-              <a:defRPr sz="1300">
-                <a:solidFill>
-                  <a:srgbClr val="2B2B2B"/>
-                </a:solidFill>
-                <a:latin typeface="Calibri"/>
-              </a:defRPr>
-            </a:pPr>
-          </a:p>
-          <a:p>
-            <a:pPr>
-              <a:spcAft>
-                <a:spcPts val="400"/>
-              </a:spcAft>
-              <a:defRPr sz="1300">
-                <a:solidFill>
-                  <a:srgbClr val="2B2B2B"/>
-                </a:solidFill>
-                <a:latin typeface="Calibri"/>
-              </a:defRPr>
-            </a:pPr>
-            <a:r>
-              <a:t>Puis joue le rôle de</a:t>
-            </a:r>
-          </a:p>
-          <a:p>
-            <a:pPr>
-              <a:spcAft>
-                <a:spcPts val="400"/>
-              </a:spcAft>
-              <a:defRPr sz="1300">
-                <a:solidFill>
-                  <a:srgbClr val="2B2B2B"/>
-                </a:solidFill>
-                <a:latin typeface="Calibri"/>
-              </a:defRPr>
-            </a:pPr>
-            <a:r>
-              <a:t>l'auditeur interne (Red</a:t>
-            </a:r>
-          </a:p>
-          <a:p>
-            <a:pPr>
-              <a:spcAft>
-                <a:spcPts val="400"/>
-              </a:spcAft>
-              <a:defRPr sz="1300">
-                <a:solidFill>
-                  <a:srgbClr val="2B2B2B"/>
-                </a:solidFill>
-                <a:latin typeface="Calibri"/>
-              </a:defRPr>
-            </a:pPr>
-            <a:r>
-              <a:t>Team) et challenge ta</a:t>
-            </a:r>
-          </a:p>
-          <a:p>
-            <a:pPr>
-              <a:spcAft>
-                <a:spcPts val="400"/>
-              </a:spcAft>
-              <a:defRPr sz="1300">
-                <a:solidFill>
-                  <a:srgbClr val="2B2B2B"/>
-                </a:solidFill>
-                <a:latin typeface="Calibri"/>
-              </a:defRPr>
-            </a:pPr>
-            <a:r>
-              <a:t>propre recommandation.»</a:t>
-            </a:r>
-          </a:p>
-        </p:txBody>
-      </p:sp>
-      <p:sp>
-        <p:nvSpPr>
-          <p:cNvPr id="6" name="Rectangle 5"/>
+          <p:cNvPr id="4" name="Rectangle 3"/>
           <p:cNvSpPr/>
           <p:nvPr/>
         </p:nvSpPr>
         <p:spPr>
           <a:xfrm>
-            <a:off x="5943600" y="1188720"/>
-            <a:ext cx="5212080" cy="5029200"/>
+            <a:off x="457200" y="1463040"/>
+            <a:ext cx="5212080" cy="4754880"/>
           </a:xfrm>
           <a:prstGeom prst="rect">
             <a:avLst/>
@@ -6370,6 +6907,7 @@
               <a:srgbClr val="E0E0E0"/>
             </a:solidFill>
           </a:ln>
+          <a:effectLst/>
         </p:spPr>
         <p:style>
           <a:lnRef idx="1">
@@ -6393,6 +6931,66 @@
           </a:p>
         </p:txBody>
       </p:sp>
+      <p:pic>
+        <p:nvPicPr>
+          <p:cNvPr id="5" name="Picture 4" descr="file-code_00874E_30.png"/>
+          <p:cNvPicPr>
+            <a:picLocks noChangeAspect="1"/>
+          </p:cNvPicPr>
+          <p:nvPr/>
+        </p:nvPicPr>
+        <p:blipFill>
+          <a:blip r:embed="rId3"/>
+          <a:stretch>
+            <a:fillRect/>
+          </a:stretch>
+        </p:blipFill>
+        <p:spPr>
+          <a:xfrm>
+            <a:off x="713232" y="1627632"/>
+            <a:ext cx="292608" cy="292608"/>
+          </a:xfrm>
+          <a:prstGeom prst="rect">
+            <a:avLst/>
+          </a:prstGeom>
+        </p:spPr>
+      </p:pic>
+      <p:sp>
+        <p:nvSpPr>
+          <p:cNvPr id="6" name="TextBox 5"/>
+          <p:cNvSpPr txBox="1"/>
+          <p:nvPr/>
+        </p:nvSpPr>
+        <p:spPr>
+          <a:xfrm>
+            <a:off x="1115568" y="1645920"/>
+            <a:ext cx="4370832" cy="457200"/>
+          </a:xfrm>
+          <a:prstGeom prst="rect">
+            <a:avLst/>
+          </a:prstGeom>
+          <a:noFill/>
+        </p:spPr>
+        <p:txBody>
+          <a:bodyPr wrap="square" lIns="45720" rIns="45720" tIns="18288" bIns="18288">
+            <a:spAutoFit/>
+          </a:bodyPr>
+          <a:lstStyle/>
+          <a:p>
+            <a:pPr algn="l">
+              <a:defRPr sz="1700" b="1">
+                <a:solidFill>
+                  <a:srgbClr val="00874E"/>
+                </a:solidFill>
+                <a:latin typeface="Calibri"/>
+              </a:defRPr>
+            </a:pPr>
+            <a:r>
+              <a:t>Le prompt complet</a:t>
+            </a:r>
+          </a:p>
+        </p:txBody>
+      </p:sp>
       <p:sp>
         <p:nvSpPr>
           <p:cNvPr id="7" name="TextBox 6"/>
@@ -6401,44 +6999,8 @@
         </p:nvSpPr>
         <p:spPr>
           <a:xfrm>
-            <a:off x="6217920" y="1371600"/>
-            <a:ext cx="4663440" cy="457200"/>
-          </a:xfrm>
-          <a:prstGeom prst="rect">
-            <a:avLst/>
-          </a:prstGeom>
-          <a:noFill/>
-        </p:spPr>
-        <p:txBody>
-          <a:bodyPr wrap="square">
-            <a:spAutoFit/>
-          </a:bodyPr>
-          <a:lstStyle/>
-          <a:p>
-            <a:pPr algn="l">
-              <a:defRPr sz="1800" b="1">
-                <a:solidFill>
-                  <a:srgbClr val="10B981"/>
-                </a:solidFill>
-                <a:latin typeface="Calibri"/>
-              </a:defRPr>
-            </a:pPr>
-            <a:r>
-              <a:t>🎯 Pourquoi ça marche</a:t>
-            </a:r>
-          </a:p>
-        </p:txBody>
-      </p:sp>
-      <p:sp>
-        <p:nvSpPr>
-          <p:cNvPr id="8" name="TextBox 7"/>
-          <p:cNvSpPr txBox="1"/>
-          <p:nvPr/>
-        </p:nvSpPr>
-        <p:spPr>
-          <a:xfrm>
-            <a:off x="6217920" y="1828800"/>
-            <a:ext cx="4663440" cy="4114800"/>
+            <a:off x="731520" y="2240280"/>
+            <a:ext cx="4663440" cy="3794760"/>
           </a:xfrm>
           <a:prstGeom prst="rect">
             <a:avLst/>
@@ -6463,7 +7025,7 @@
               </a:defRPr>
             </a:pPr>
             <a:r>
-              <a:t>✅ CoT: raisonnement</a:t>
+              <a:t>«En tant que chef de projet</a:t>
             </a:r>
           </a:p>
           <a:p>
@@ -6479,7 +7041,7 @@
               </a:defRPr>
             </a:pPr>
             <a:r>
-              <a:t>   structuré, pas de saut</a:t>
+              <a:t>senior, analyse étape par</a:t>
             </a:r>
           </a:p>
           <a:p>
@@ -6494,6 +7056,9 @@
                 <a:latin typeface="Calibri"/>
               </a:defRPr>
             </a:pPr>
+            <a:r>
+              <a:t>étape si nous devons</a:t>
+            </a:r>
           </a:p>
           <a:p>
             <a:pPr>
@@ -6508,7 +7073,7 @@
               </a:defRPr>
             </a:pPr>
             <a:r>
-              <a:t>✅ ToT: 2 options</a:t>
+              <a:t>approuver ce budget.</a:t>
             </a:r>
           </a:p>
           <a:p>
@@ -6523,9 +7088,6 @@
                 <a:latin typeface="Calibri"/>
               </a:defRPr>
             </a:pPr>
-            <a:r>
-              <a:t>   explorées, comparées</a:t>
-            </a:r>
           </a:p>
           <a:p>
             <a:pPr>
@@ -6539,6 +7101,9 @@
                 <a:latin typeface="Calibri"/>
               </a:defRPr>
             </a:pPr>
+            <a:r>
+              <a:t>Explore 2 scénarios:</a:t>
+            </a:r>
           </a:p>
           <a:p>
             <a:pPr>
@@ -6553,7 +7118,7 @@
               </a:defRPr>
             </a:pPr>
             <a:r>
-              <a:t>✅ Red Team: biais</a:t>
+              <a:t>A) Approuver tel quel</a:t>
             </a:r>
           </a:p>
           <a:p>
@@ -6569,7 +7134,7 @@
               </a:defRPr>
             </a:pPr>
             <a:r>
-              <a:t>   réduit, décision</a:t>
+              <a:t>B) Demander des</a:t>
             </a:r>
           </a:p>
           <a:p>
@@ -6585,7 +7150,7 @@
               </a:defRPr>
             </a:pPr>
             <a:r>
-              <a:t>   robuste</a:t>
+              <a:t>modifications</a:t>
             </a:r>
           </a:p>
           <a:p>
@@ -6614,7 +7179,7 @@
               </a:defRPr>
             </a:pPr>
             <a:r>
-              <a:t>🎯 Utilisez-le sur votre</a:t>
+              <a:t>Puis joue le rôle de</a:t>
             </a:r>
           </a:p>
           <a:p>
@@ -6630,7 +7195,467 @@
               </a:defRPr>
             </a:pPr>
             <a:r>
-              <a:t>   prochaine décision!</a:t>
+              <a:t>l'auditeur interne (Red</a:t>
+            </a:r>
+          </a:p>
+          <a:p>
+            <a:pPr>
+              <a:spcAft>
+                <a:spcPts val="400"/>
+              </a:spcAft>
+              <a:defRPr sz="1300">
+                <a:solidFill>
+                  <a:srgbClr val="2B2B2B"/>
+                </a:solidFill>
+                <a:latin typeface="Calibri"/>
+              </a:defRPr>
+            </a:pPr>
+            <a:r>
+              <a:t>Team) et challenge ta</a:t>
+            </a:r>
+          </a:p>
+          <a:p>
+            <a:pPr>
+              <a:spcAft>
+                <a:spcPts val="400"/>
+              </a:spcAft>
+              <a:defRPr sz="1300">
+                <a:solidFill>
+                  <a:srgbClr val="2B2B2B"/>
+                </a:solidFill>
+                <a:latin typeface="Calibri"/>
+              </a:defRPr>
+            </a:pPr>
+            <a:r>
+              <a:t>propre recommandation.»</a:t>
+            </a:r>
+          </a:p>
+        </p:txBody>
+      </p:sp>
+      <p:sp>
+        <p:nvSpPr>
+          <p:cNvPr id="8" name="Rectangle 7"/>
+          <p:cNvSpPr/>
+          <p:nvPr/>
+        </p:nvSpPr>
+        <p:spPr>
+          <a:xfrm>
+            <a:off x="5943600" y="1463040"/>
+            <a:ext cx="5212080" cy="4754880"/>
+          </a:xfrm>
+          <a:prstGeom prst="rect">
+            <a:avLst/>
+          </a:prstGeom>
+          <a:solidFill>
+            <a:srgbClr val="FFFFFF"/>
+          </a:solidFill>
+          <a:ln>
+            <a:solidFill>
+              <a:srgbClr val="E0E0E0"/>
+            </a:solidFill>
+          </a:ln>
+          <a:effectLst/>
+        </p:spPr>
+        <p:style>
+          <a:lnRef idx="1">
+            <a:schemeClr val="accent1"/>
+          </a:lnRef>
+          <a:fillRef idx="3">
+            <a:schemeClr val="accent1"/>
+          </a:fillRef>
+          <a:effectRef idx="2">
+            <a:schemeClr val="accent1"/>
+          </a:effectRef>
+          <a:fontRef idx="minor">
+            <a:schemeClr val="lt1"/>
+          </a:fontRef>
+        </p:style>
+        <p:txBody>
+          <a:bodyPr rtlCol="0" anchor="ctr"/>
+          <a:lstStyle/>
+          <a:p>
+            <a:pPr algn="ctr"/>
+          </a:p>
+        </p:txBody>
+      </p:sp>
+      <p:pic>
+        <p:nvPicPr>
+          <p:cNvPr id="9" name="Picture 8" descr="lightbulb_00874E_30.png"/>
+          <p:cNvPicPr>
+            <a:picLocks noChangeAspect="1"/>
+          </p:cNvPicPr>
+          <p:nvPr/>
+        </p:nvPicPr>
+        <p:blipFill>
+          <a:blip r:embed="rId4"/>
+          <a:stretch>
+            <a:fillRect/>
+          </a:stretch>
+        </p:blipFill>
+        <p:spPr>
+          <a:xfrm>
+            <a:off x="6199632" y="1627632"/>
+            <a:ext cx="292608" cy="292608"/>
+          </a:xfrm>
+          <a:prstGeom prst="rect">
+            <a:avLst/>
+          </a:prstGeom>
+        </p:spPr>
+      </p:pic>
+      <p:sp>
+        <p:nvSpPr>
+          <p:cNvPr id="10" name="TextBox 9"/>
+          <p:cNvSpPr txBox="1"/>
+          <p:nvPr/>
+        </p:nvSpPr>
+        <p:spPr>
+          <a:xfrm>
+            <a:off x="6601968" y="1645920"/>
+            <a:ext cx="4370831" cy="457200"/>
+          </a:xfrm>
+          <a:prstGeom prst="rect">
+            <a:avLst/>
+          </a:prstGeom>
+          <a:noFill/>
+        </p:spPr>
+        <p:txBody>
+          <a:bodyPr wrap="square" lIns="45720" rIns="45720" tIns="18288" bIns="18288">
+            <a:spAutoFit/>
+          </a:bodyPr>
+          <a:lstStyle/>
+          <a:p>
+            <a:pPr algn="l">
+              <a:defRPr sz="1700" b="1">
+                <a:solidFill>
+                  <a:srgbClr val="00874E"/>
+                </a:solidFill>
+                <a:latin typeface="Calibri"/>
+              </a:defRPr>
+            </a:pPr>
+            <a:r>
+              <a:t>Pourquoi ça marche</a:t>
+            </a:r>
+          </a:p>
+        </p:txBody>
+      </p:sp>
+      <p:sp>
+        <p:nvSpPr>
+          <p:cNvPr id="11" name="TextBox 10"/>
+          <p:cNvSpPr txBox="1"/>
+          <p:nvPr/>
+        </p:nvSpPr>
+        <p:spPr>
+          <a:xfrm>
+            <a:off x="6217920" y="2240280"/>
+            <a:ext cx="4663440" cy="3794760"/>
+          </a:xfrm>
+          <a:prstGeom prst="rect">
+            <a:avLst/>
+          </a:prstGeom>
+          <a:noFill/>
+        </p:spPr>
+        <p:txBody>
+          <a:bodyPr wrap="square">
+            <a:spAutoFit/>
+          </a:bodyPr>
+          <a:lstStyle/>
+          <a:p>
+            <a:pPr>
+              <a:spcAft>
+                <a:spcPts val="400"/>
+              </a:spcAft>
+              <a:defRPr sz="1300">
+                <a:solidFill>
+                  <a:srgbClr val="2B2B2B"/>
+                </a:solidFill>
+                <a:latin typeface="Calibri"/>
+              </a:defRPr>
+            </a:pPr>
+            <a:r>
+              <a:t>CoT: raisonnement</a:t>
+            </a:r>
+          </a:p>
+          <a:p>
+            <a:pPr>
+              <a:spcAft>
+                <a:spcPts val="400"/>
+              </a:spcAft>
+              <a:defRPr sz="1300">
+                <a:solidFill>
+                  <a:srgbClr val="2B2B2B"/>
+                </a:solidFill>
+                <a:latin typeface="Calibri"/>
+              </a:defRPr>
+            </a:pPr>
+            <a:r>
+              <a:t>structuré, pas de saut</a:t>
+            </a:r>
+          </a:p>
+          <a:p>
+            <a:pPr>
+              <a:spcAft>
+                <a:spcPts val="400"/>
+              </a:spcAft>
+              <a:defRPr sz="1300">
+                <a:solidFill>
+                  <a:srgbClr val="2B2B2B"/>
+                </a:solidFill>
+                <a:latin typeface="Calibri"/>
+              </a:defRPr>
+            </a:pPr>
+          </a:p>
+          <a:p>
+            <a:pPr>
+              <a:spcAft>
+                <a:spcPts val="400"/>
+              </a:spcAft>
+              <a:defRPr sz="1300">
+                <a:solidFill>
+                  <a:srgbClr val="2B2B2B"/>
+                </a:solidFill>
+                <a:latin typeface="Calibri"/>
+              </a:defRPr>
+            </a:pPr>
+            <a:r>
+              <a:t>ToT: 2 options</a:t>
+            </a:r>
+          </a:p>
+          <a:p>
+            <a:pPr>
+              <a:spcAft>
+                <a:spcPts val="400"/>
+              </a:spcAft>
+              <a:defRPr sz="1300">
+                <a:solidFill>
+                  <a:srgbClr val="2B2B2B"/>
+                </a:solidFill>
+                <a:latin typeface="Calibri"/>
+              </a:defRPr>
+            </a:pPr>
+            <a:r>
+              <a:t>explorées, comparées</a:t>
+            </a:r>
+          </a:p>
+          <a:p>
+            <a:pPr>
+              <a:spcAft>
+                <a:spcPts val="400"/>
+              </a:spcAft>
+              <a:defRPr sz="1300">
+                <a:solidFill>
+                  <a:srgbClr val="2B2B2B"/>
+                </a:solidFill>
+                <a:latin typeface="Calibri"/>
+              </a:defRPr>
+            </a:pPr>
+          </a:p>
+          <a:p>
+            <a:pPr>
+              <a:spcAft>
+                <a:spcPts val="400"/>
+              </a:spcAft>
+              <a:defRPr sz="1300">
+                <a:solidFill>
+                  <a:srgbClr val="2B2B2B"/>
+                </a:solidFill>
+                <a:latin typeface="Calibri"/>
+              </a:defRPr>
+            </a:pPr>
+            <a:r>
+              <a:t>Red Team: biais</a:t>
+            </a:r>
+          </a:p>
+          <a:p>
+            <a:pPr>
+              <a:spcAft>
+                <a:spcPts val="400"/>
+              </a:spcAft>
+              <a:defRPr sz="1300">
+                <a:solidFill>
+                  <a:srgbClr val="2B2B2B"/>
+                </a:solidFill>
+                <a:latin typeface="Calibri"/>
+              </a:defRPr>
+            </a:pPr>
+            <a:r>
+              <a:t>réduit, décision</a:t>
+            </a:r>
+          </a:p>
+          <a:p>
+            <a:pPr>
+              <a:spcAft>
+                <a:spcPts val="400"/>
+              </a:spcAft>
+              <a:defRPr sz="1300">
+                <a:solidFill>
+                  <a:srgbClr val="2B2B2B"/>
+                </a:solidFill>
+                <a:latin typeface="Calibri"/>
+              </a:defRPr>
+            </a:pPr>
+            <a:r>
+              <a:t>robuste</a:t>
+            </a:r>
+          </a:p>
+          <a:p>
+            <a:pPr>
+              <a:spcAft>
+                <a:spcPts val="400"/>
+              </a:spcAft>
+              <a:defRPr sz="1300">
+                <a:solidFill>
+                  <a:srgbClr val="2B2B2B"/>
+                </a:solidFill>
+                <a:latin typeface="Calibri"/>
+              </a:defRPr>
+            </a:pPr>
+          </a:p>
+          <a:p>
+            <a:pPr>
+              <a:spcAft>
+                <a:spcPts val="400"/>
+              </a:spcAft>
+              <a:defRPr sz="1300">
+                <a:solidFill>
+                  <a:srgbClr val="2B2B2B"/>
+                </a:solidFill>
+                <a:latin typeface="Calibri"/>
+              </a:defRPr>
+            </a:pPr>
+            <a:r>
+              <a:t>Utilisez-le sur votre</a:t>
+            </a:r>
+          </a:p>
+          <a:p>
+            <a:pPr>
+              <a:spcAft>
+                <a:spcPts val="400"/>
+              </a:spcAft>
+              <a:defRPr sz="1300">
+                <a:solidFill>
+                  <a:srgbClr val="2B2B2B"/>
+                </a:solidFill>
+                <a:latin typeface="Calibri"/>
+              </a:defRPr>
+            </a:pPr>
+            <a:r>
+              <a:t>prochaine décision!</a:t>
+            </a:r>
+          </a:p>
+        </p:txBody>
+      </p:sp>
+      <p:sp>
+        <p:nvSpPr>
+          <p:cNvPr id="12" name="Rectangle 11"/>
+          <p:cNvSpPr/>
+          <p:nvPr/>
+        </p:nvSpPr>
+        <p:spPr>
+          <a:xfrm>
+            <a:off x="457200" y="6446520"/>
+            <a:ext cx="11274552" cy="13716"/>
+          </a:xfrm>
+          <a:prstGeom prst="rect">
+            <a:avLst/>
+          </a:prstGeom>
+          <a:solidFill>
+            <a:srgbClr val="00874E"/>
+          </a:solidFill>
+          <a:ln>
+            <a:noFill/>
+          </a:ln>
+          <a:effectLst/>
+        </p:spPr>
+        <p:style>
+          <a:lnRef idx="1">
+            <a:schemeClr val="accent1"/>
+          </a:lnRef>
+          <a:fillRef idx="3">
+            <a:schemeClr val="accent1"/>
+          </a:fillRef>
+          <a:effectRef idx="2">
+            <a:schemeClr val="accent1"/>
+          </a:effectRef>
+          <a:fontRef idx="minor">
+            <a:schemeClr val="lt1"/>
+          </a:fontRef>
+        </p:style>
+        <p:txBody>
+          <a:bodyPr rtlCol="0" anchor="ctr"/>
+          <a:lstStyle/>
+          <a:p>
+            <a:pPr algn="ctr"/>
+          </a:p>
+        </p:txBody>
+      </p:sp>
+      <p:sp>
+        <p:nvSpPr>
+          <p:cNvPr id="13" name="TextBox 12"/>
+          <p:cNvSpPr txBox="1"/>
+          <p:nvPr/>
+        </p:nvSpPr>
+        <p:spPr>
+          <a:xfrm>
+            <a:off x="457200" y="6537960"/>
+            <a:ext cx="5486400" cy="274320"/>
+          </a:xfrm>
+          <a:prstGeom prst="rect">
+            <a:avLst/>
+          </a:prstGeom>
+          <a:noFill/>
+        </p:spPr>
+        <p:txBody>
+          <a:bodyPr wrap="square" lIns="45720" rIns="45720" tIns="18288" bIns="18288">
+            <a:spAutoFit/>
+          </a:bodyPr>
+          <a:lstStyle/>
+          <a:p>
+            <a:pPr algn="l">
+              <a:defRPr sz="1000" b="0">
+                <a:solidFill>
+                  <a:srgbClr val="6B6B6B"/>
+                </a:solidFill>
+                <a:latin typeface="Calibri"/>
+              </a:defRPr>
+            </a:pPr>
+            <a:r>
+              <a:t>La minute Copilot</a:t>
+            </a:r>
+          </a:p>
+        </p:txBody>
+      </p:sp>
+      <p:sp>
+        <p:nvSpPr>
+          <p:cNvPr id="14" name="TextBox 13"/>
+          <p:cNvSpPr txBox="1"/>
+          <p:nvPr/>
+        </p:nvSpPr>
+        <p:spPr>
+          <a:xfrm>
+            <a:off x="10972800" y="6537960"/>
+            <a:ext cx="822960" cy="274320"/>
+          </a:xfrm>
+          <a:prstGeom prst="rect">
+            <a:avLst/>
+          </a:prstGeom>
+          <a:noFill/>
+        </p:spPr>
+        <p:txBody>
+          <a:bodyPr wrap="square" lIns="45720" rIns="45720" tIns="18288" bIns="18288">
+            <a:spAutoFit/>
+          </a:bodyPr>
+          <a:lstStyle/>
+          <a:p>
+            <a:pPr algn="r">
+              <a:defRPr sz="1000" b="0">
+                <a:solidFill>
+                  <a:srgbClr val="6B6B6B"/>
+                </a:solidFill>
+                <a:latin typeface="Calibri"/>
+              </a:defRPr>
+            </a:pPr>
+            <a:r>
+              <a:t>5</a:t>
             </a:r>
           </a:p>
         </p:txBody>
@@ -6649,7 +7674,7 @@
     <p:bg>
       <p:bgPr>
         <a:solidFill>
-          <a:srgbClr val="0078D4"/>
+          <a:srgbClr val="00874E"/>
         </a:solidFill>
         <a:effectLst/>
       </p:bgPr>
@@ -6669,8 +7694,8 @@
         </p:nvSpPr>
         <p:spPr>
           <a:xfrm>
-            <a:off x="914400" y="914400"/>
-            <a:ext cx="10058400" cy="731520"/>
+            <a:off x="914400" y="731520"/>
+            <a:ext cx="10360152" cy="822960"/>
           </a:xfrm>
           <a:prstGeom prst="rect">
             <a:avLst/>
@@ -6678,13 +7703,13 @@
           <a:noFill/>
         </p:spPr>
         <p:txBody>
-          <a:bodyPr wrap="square">
+          <a:bodyPr wrap="square" lIns="45720" rIns="45720" tIns="18288" bIns="18288">
             <a:spAutoFit/>
           </a:bodyPr>
           <a:lstStyle/>
           <a:p>
             <a:pPr algn="ctr">
-              <a:defRPr sz="4000" b="1">
+              <a:defRPr sz="3600" b="1">
                 <a:solidFill>
                   <a:srgbClr val="FFFFFF"/>
                 </a:solidFill>
@@ -6692,7 +7717,7 @@
               </a:defRPr>
             </a:pPr>
             <a:r>
-              <a:t>🎯 Les 3 techniques avancées</a:t>
+              <a:t>Les 3 techniques avancées</a:t>
             </a:r>
           </a:p>
         </p:txBody>
@@ -6705,8 +7730,8 @@
         </p:nvSpPr>
         <p:spPr>
           <a:xfrm>
-            <a:off x="365760" y="2011680"/>
-            <a:ext cx="3474720" cy="2286000"/>
+            <a:off x="4572000" y="1691640"/>
+            <a:ext cx="3044952" cy="36576"/>
           </a:xfrm>
           <a:prstGeom prst="rect">
             <a:avLst/>
@@ -6715,10 +7740,9 @@
             <a:srgbClr val="FFFFFF"/>
           </a:solidFill>
           <a:ln>
-            <a:solidFill>
-              <a:srgbClr val="AAD4F0"/>
-            </a:solidFill>
+            <a:noFill/>
           </a:ln>
+          <a:effectLst/>
         </p:spPr>
         <p:style>
           <a:lnRef idx="1">
@@ -6744,94 +7768,14 @@
       </p:sp>
       <p:sp>
         <p:nvSpPr>
-          <p:cNvPr id="4" name="TextBox 3"/>
-          <p:cNvSpPr txBox="1"/>
-          <p:nvPr/>
-        </p:nvSpPr>
-        <p:spPr>
-          <a:xfrm>
-            <a:off x="640080" y="2194560"/>
-            <a:ext cx="2926079" cy="548640"/>
-          </a:xfrm>
-          <a:prstGeom prst="rect">
-            <a:avLst/>
-          </a:prstGeom>
-          <a:noFill/>
-        </p:spPr>
-        <p:txBody>
-          <a:bodyPr wrap="square">
-            <a:spAutoFit/>
-          </a:bodyPr>
-          <a:lstStyle/>
-          <a:p>
-            <a:pPr algn="ctr">
-              <a:defRPr sz="2200" b="1">
-                <a:solidFill>
-                  <a:srgbClr val="2B2B2B"/>
-                </a:solidFill>
-                <a:latin typeface="Calibri"/>
-              </a:defRPr>
-            </a:pPr>
-            <a:r>
-              <a:t>🧠 Chain of Thought</a:t>
-            </a:r>
-          </a:p>
-        </p:txBody>
-      </p:sp>
-      <p:sp>
-        <p:nvSpPr>
-          <p:cNvPr id="5" name="TextBox 4"/>
-          <p:cNvSpPr txBox="1"/>
-          <p:nvPr/>
-        </p:nvSpPr>
-        <p:spPr>
-          <a:xfrm>
-            <a:off x="640080" y="2926080"/>
-            <a:ext cx="2926079" cy="914400"/>
-          </a:xfrm>
-          <a:prstGeom prst="rect">
-            <a:avLst/>
-          </a:prstGeom>
-          <a:noFill/>
-        </p:spPr>
-        <p:txBody>
-          <a:bodyPr wrap="square">
-            <a:spAutoFit/>
-          </a:bodyPr>
-          <a:lstStyle/>
-          <a:p>
-            <a:pPr algn="ctr">
-              <a:defRPr sz="1600" b="0">
-                <a:solidFill>
-                  <a:srgbClr val="6B6B6B"/>
-                </a:solidFill>
-                <a:latin typeface="Calibri"/>
-              </a:defRPr>
-            </a:pPr>
-            <a:r>
-              <a:t>«Raisonne étape</a:t>
-            </a:r>
-            <a:br/>
-            <a:r>
-              <a:t>par étape»</a:t>
-            </a:r>
-            <a:br/>
-            <a:r>
-              <a:t>Moins d'erreurs</a:t>
-            </a:r>
-          </a:p>
-        </p:txBody>
-      </p:sp>
-      <p:sp>
-        <p:nvSpPr>
-          <p:cNvPr id="6" name="Rectangle 5"/>
+          <p:cNvPr id="4" name="Rectangle 3"/>
           <p:cNvSpPr/>
           <p:nvPr/>
         </p:nvSpPr>
         <p:spPr>
           <a:xfrm>
-            <a:off x="3749040" y="2011680"/>
-            <a:ext cx="3474720" cy="2286000"/>
+            <a:off x="806957" y="2103120"/>
+            <a:ext cx="3291840" cy="2286000"/>
           </a:xfrm>
           <a:prstGeom prst="rect">
             <a:avLst/>
@@ -6841,9 +7785,10 @@
           </a:solidFill>
           <a:ln>
             <a:solidFill>
-              <a:srgbClr val="AAD4F0"/>
+              <a:srgbClr val="CCE0D2"/>
             </a:solidFill>
           </a:ln>
+          <a:effectLst/>
         </p:spPr>
         <p:style>
           <a:lnRef idx="1">
@@ -6867,6 +7812,66 @@
           </a:p>
         </p:txBody>
       </p:sp>
+      <p:pic>
+        <p:nvPicPr>
+          <p:cNvPr id="5" name="Picture 4" descr="list-ordered_006B3F_36.png"/>
+          <p:cNvPicPr>
+            <a:picLocks noChangeAspect="1"/>
+          </p:cNvPicPr>
+          <p:nvPr/>
+        </p:nvPicPr>
+        <p:blipFill>
+          <a:blip r:embed="rId3"/>
+          <a:stretch>
+            <a:fillRect/>
+          </a:stretch>
+        </p:blipFill>
+        <p:spPr>
+          <a:xfrm>
+            <a:off x="2279141" y="2176272"/>
+            <a:ext cx="347472" cy="347472"/>
+          </a:xfrm>
+          <a:prstGeom prst="rect">
+            <a:avLst/>
+          </a:prstGeom>
+        </p:spPr>
+      </p:pic>
+      <p:sp>
+        <p:nvSpPr>
+          <p:cNvPr id="6" name="TextBox 5"/>
+          <p:cNvSpPr txBox="1"/>
+          <p:nvPr/>
+        </p:nvSpPr>
+        <p:spPr>
+          <a:xfrm>
+            <a:off x="944117" y="2596896"/>
+            <a:ext cx="3017520" cy="548640"/>
+          </a:xfrm>
+          <a:prstGeom prst="rect">
+            <a:avLst/>
+          </a:prstGeom>
+          <a:noFill/>
+        </p:spPr>
+        <p:txBody>
+          <a:bodyPr wrap="square" lIns="45720" rIns="45720" tIns="18288" bIns="18288">
+            <a:spAutoFit/>
+          </a:bodyPr>
+          <a:lstStyle/>
+          <a:p>
+            <a:pPr algn="ctr">
+              <a:defRPr sz="2200" b="1">
+                <a:solidFill>
+                  <a:srgbClr val="006B3F"/>
+                </a:solidFill>
+                <a:latin typeface="Calibri"/>
+              </a:defRPr>
+            </a:pPr>
+            <a:r>
+              <a:t>Chain of Thought</a:t>
+            </a:r>
+          </a:p>
+        </p:txBody>
+      </p:sp>
       <p:sp>
         <p:nvSpPr>
           <p:cNvPr id="7" name="TextBox 6"/>
@@ -6875,8 +7880,8 @@
         </p:nvSpPr>
         <p:spPr>
           <a:xfrm>
-            <a:off x="4023360" y="2194560"/>
-            <a:ext cx="2926079" cy="548640"/>
+            <a:off x="944117" y="3236976"/>
+            <a:ext cx="3017520" cy="914400"/>
           </a:xfrm>
           <a:prstGeom prst="rect">
             <a:avLst/>
@@ -6884,49 +7889,13 @@
           <a:noFill/>
         </p:spPr>
         <p:txBody>
-          <a:bodyPr wrap="square">
+          <a:bodyPr wrap="square" lIns="45720" rIns="45720" tIns="18288" bIns="18288">
             <a:spAutoFit/>
           </a:bodyPr>
           <a:lstStyle/>
           <a:p>
             <a:pPr algn="ctr">
-              <a:defRPr sz="2200" b="1">
-                <a:solidFill>
-                  <a:srgbClr val="2B2B2B"/>
-                </a:solidFill>
-                <a:latin typeface="Calibri"/>
-              </a:defRPr>
-            </a:pPr>
-            <a:r>
-              <a:t>🌳 Tree of Thought</a:t>
-            </a:r>
-          </a:p>
-        </p:txBody>
-      </p:sp>
-      <p:sp>
-        <p:nvSpPr>
-          <p:cNvPr id="8" name="TextBox 7"/>
-          <p:cNvSpPr txBox="1"/>
-          <p:nvPr/>
-        </p:nvSpPr>
-        <p:spPr>
-          <a:xfrm>
-            <a:off x="4023360" y="2926080"/>
-            <a:ext cx="2926079" cy="914400"/>
-          </a:xfrm>
-          <a:prstGeom prst="rect">
-            <a:avLst/>
-          </a:prstGeom>
-          <a:noFill/>
-        </p:spPr>
-        <p:txBody>
-          <a:bodyPr wrap="square">
-            <a:spAutoFit/>
-          </a:bodyPr>
-          <a:lstStyle/>
-          <a:p>
-            <a:pPr algn="ctr">
-              <a:defRPr sz="1600" b="0">
+              <a:defRPr sz="1500" b="0">
                 <a:solidFill>
                   <a:srgbClr val="6B6B6B"/>
                 </a:solidFill>
@@ -6934,29 +7903,29 @@
               </a:defRPr>
             </a:pPr>
             <a:r>
-              <a:t>Explore plusieurs</a:t>
+              <a:t>«Raisonne étape</a:t>
             </a:r>
             <a:br/>
             <a:r>
-              <a:t>options, compare,</a:t>
+              <a:t>par étape»</a:t>
             </a:r>
             <a:br/>
             <a:r>
-              <a:t>recommande</a:t>
-            </a:r>
-          </a:p>
-        </p:txBody>
-      </p:sp>
-      <p:sp>
-        <p:nvSpPr>
-          <p:cNvPr id="9" name="Rectangle 8"/>
+              <a:t>Moins d'erreurs</a:t>
+            </a:r>
+          </a:p>
+        </p:txBody>
+      </p:sp>
+      <p:sp>
+        <p:nvSpPr>
+          <p:cNvPr id="8" name="Rectangle 7"/>
           <p:cNvSpPr/>
           <p:nvPr/>
         </p:nvSpPr>
         <p:spPr>
           <a:xfrm>
-            <a:off x="7132320" y="2011680"/>
-            <a:ext cx="3474720" cy="2286000"/>
+            <a:off x="4448556" y="2103120"/>
+            <a:ext cx="3291840" cy="2286000"/>
           </a:xfrm>
           <a:prstGeom prst="rect">
             <a:avLst/>
@@ -6966,9 +7935,10 @@
           </a:solidFill>
           <a:ln>
             <a:solidFill>
-              <a:srgbClr val="AAD4F0"/>
+              <a:srgbClr val="CCE0D2"/>
             </a:solidFill>
           </a:ln>
+          <a:effectLst/>
         </p:spPr>
         <p:style>
           <a:lnRef idx="1">
@@ -6992,6 +7962,30 @@
           </a:p>
         </p:txBody>
       </p:sp>
+      <p:pic>
+        <p:nvPicPr>
+          <p:cNvPr id="9" name="Picture 8" descr="git-branch_006B3F_36.png"/>
+          <p:cNvPicPr>
+            <a:picLocks noChangeAspect="1"/>
+          </p:cNvPicPr>
+          <p:nvPr/>
+        </p:nvPicPr>
+        <p:blipFill>
+          <a:blip r:embed="rId4"/>
+          <a:stretch>
+            <a:fillRect/>
+          </a:stretch>
+        </p:blipFill>
+        <p:spPr>
+          <a:xfrm>
+            <a:off x="5920740" y="2176272"/>
+            <a:ext cx="347472" cy="347472"/>
+          </a:xfrm>
+          <a:prstGeom prst="rect">
+            <a:avLst/>
+          </a:prstGeom>
+        </p:spPr>
+      </p:pic>
       <p:sp>
         <p:nvSpPr>
           <p:cNvPr id="10" name="TextBox 9"/>
@@ -7000,8 +7994,8 @@
         </p:nvSpPr>
         <p:spPr>
           <a:xfrm>
-            <a:off x="7406640" y="2194560"/>
-            <a:ext cx="2926079" cy="548640"/>
+            <a:off x="4585716" y="2596896"/>
+            <a:ext cx="3017520" cy="548640"/>
           </a:xfrm>
           <a:prstGeom prst="rect">
             <a:avLst/>
@@ -7009,7 +8003,7 @@
           <a:noFill/>
         </p:spPr>
         <p:txBody>
-          <a:bodyPr wrap="square">
+          <a:bodyPr wrap="square" lIns="45720" rIns="45720" tIns="18288" bIns="18288">
             <a:spAutoFit/>
           </a:bodyPr>
           <a:lstStyle/>
@@ -7017,13 +8011,13 @@
             <a:pPr algn="ctr">
               <a:defRPr sz="2200" b="1">
                 <a:solidFill>
-                  <a:srgbClr val="2B2B2B"/>
-                </a:solidFill>
-                <a:latin typeface="Calibri"/>
-              </a:defRPr>
-            </a:pPr>
-            <a:r>
-              <a:t>⚔️ Red/Blue Team</a:t>
+                  <a:srgbClr val="006B3F"/>
+                </a:solidFill>
+                <a:latin typeface="Calibri"/>
+              </a:defRPr>
+            </a:pPr>
+            <a:r>
+              <a:t>Tree of Thought</a:t>
             </a:r>
           </a:p>
         </p:txBody>
@@ -7036,8 +8030,8 @@
         </p:nvSpPr>
         <p:spPr>
           <a:xfrm>
-            <a:off x="7406640" y="2926080"/>
-            <a:ext cx="2926079" cy="914400"/>
+            <a:off x="4585716" y="3236976"/>
+            <a:ext cx="3017520" cy="914400"/>
           </a:xfrm>
           <a:prstGeom prst="rect">
             <a:avLst/>
@@ -7045,13 +8039,13 @@
           <a:noFill/>
         </p:spPr>
         <p:txBody>
-          <a:bodyPr wrap="square">
+          <a:bodyPr wrap="square" lIns="45720" rIns="45720" tIns="18288" bIns="18288">
             <a:spAutoFit/>
           </a:bodyPr>
           <a:lstStyle/>
           <a:p>
             <a:pPr algn="ctr">
-              <a:defRPr sz="1600" b="0">
+              <a:defRPr sz="1500" b="0">
                 <a:solidFill>
                   <a:srgbClr val="6B6B6B"/>
                 </a:solidFill>
@@ -7059,11 +8053,15 @@
               </a:defRPr>
             </a:pPr>
             <a:r>
-              <a:t>Propose + critique</a:t>
+              <a:t>Explore plusieurs</a:t>
             </a:r>
             <a:br/>
             <a:r>
-              <a:t>Décisions robustes</a:t>
+              <a:t>options, compare,</a:t>
+            </a:r>
+            <a:br/>
+            <a:r>
+              <a:t>recommande</a:t>
             </a:r>
           </a:p>
         </p:txBody>
@@ -7076,20 +8074,21 @@
         </p:nvSpPr>
         <p:spPr>
           <a:xfrm>
-            <a:off x="3200400" y="4754880"/>
-            <a:ext cx="5760720" cy="1097280"/>
+            <a:off x="8090154" y="2103120"/>
+            <a:ext cx="3291840" cy="2286000"/>
           </a:xfrm>
           <a:prstGeom prst="rect">
             <a:avLst/>
           </a:prstGeom>
           <a:solidFill>
-            <a:srgbClr val="FFF3CD"/>
+            <a:srgbClr val="FFFFFF"/>
           </a:solidFill>
           <a:ln>
             <a:solidFill>
-              <a:srgbClr val="FFE082"/>
+              <a:srgbClr val="CCE0D2"/>
             </a:solidFill>
           </a:ln>
+          <a:effectLst/>
         </p:spPr>
         <p:style>
           <a:lnRef idx="1">
@@ -7113,42 +8112,30 @@
           </a:p>
         </p:txBody>
       </p:sp>
-      <p:sp>
-        <p:nvSpPr>
-          <p:cNvPr id="13" name="TextBox 12"/>
-          <p:cNvSpPr txBox="1"/>
+      <p:pic>
+        <p:nvPicPr>
+          <p:cNvPr id="13" name="Picture 12" descr="swords_006B3F_36.png"/>
+          <p:cNvPicPr>
+            <a:picLocks noChangeAspect="1"/>
+          </p:cNvPicPr>
           <p:nvPr/>
-        </p:nvSpPr>
-        <p:spPr>
-          <a:xfrm>
-            <a:off x="3383280" y="4937760"/>
-            <a:ext cx="5394960" cy="548640"/>
-          </a:xfrm>
-          <a:prstGeom prst="rect">
-            <a:avLst/>
-          </a:prstGeom>
-          <a:noFill/>
-        </p:spPr>
-        <p:txBody>
-          <a:bodyPr wrap="square">
-            <a:spAutoFit/>
-          </a:bodyPr>
-          <a:lstStyle/>
-          <a:p>
-            <a:pPr algn="ctr">
-              <a:defRPr sz="1600" b="1">
-                <a:solidFill>
-                  <a:srgbClr val="856E04"/>
-                </a:solidFill>
-                <a:latin typeface="Calibri"/>
-              </a:defRPr>
-            </a:pPr>
-            <a:r>
-              <a:t>🎯 Défi: Essayez «Analyse étape par étape... puis challenge ta réponse» cette semaine!</a:t>
-            </a:r>
-          </a:p>
-        </p:txBody>
-      </p:sp>
+        </p:nvPicPr>
+        <p:blipFill>
+          <a:blip r:embed="rId5"/>
+          <a:stretch>
+            <a:fillRect/>
+          </a:stretch>
+        </p:blipFill>
+        <p:spPr>
+          <a:xfrm>
+            <a:off x="9562338" y="2176272"/>
+            <a:ext cx="347472" cy="347472"/>
+          </a:xfrm>
+          <a:prstGeom prst="rect">
+            <a:avLst/>
+          </a:prstGeom>
+        </p:spPr>
+      </p:pic>
       <p:sp>
         <p:nvSpPr>
           <p:cNvPr id="14" name="TextBox 13"/>
@@ -7157,8 +8144,8 @@
         </p:nvSpPr>
         <p:spPr>
           <a:xfrm>
-            <a:off x="914400" y="6126480"/>
-            <a:ext cx="10058400" cy="457200"/>
+            <a:off x="8227314" y="2596896"/>
+            <a:ext cx="3017520" cy="548640"/>
           </a:xfrm>
           <a:prstGeom prst="rect">
             <a:avLst/>
@@ -7166,21 +8153,223 @@
           <a:noFill/>
         </p:spPr>
         <p:txBody>
-          <a:bodyPr wrap="square">
+          <a:bodyPr wrap="square" lIns="45720" rIns="45720" tIns="18288" bIns="18288">
             <a:spAutoFit/>
           </a:bodyPr>
           <a:lstStyle/>
           <a:p>
             <a:pPr algn="ctr">
-              <a:defRPr sz="1400" b="0">
-                <a:solidFill>
-                  <a:srgbClr val="AAD4F0"/>
-                </a:solidFill>
-                <a:latin typeface="Calibri"/>
-              </a:defRPr>
-            </a:pPr>
-            <a:r>
-              <a:t>La minute Copilot — À la semaine prochaine! 👋</a:t>
+              <a:defRPr sz="2200" b="1">
+                <a:solidFill>
+                  <a:srgbClr val="006B3F"/>
+                </a:solidFill>
+                <a:latin typeface="Calibri"/>
+              </a:defRPr>
+            </a:pPr>
+            <a:r>
+              <a:t>Red/Blue Team</a:t>
+            </a:r>
+          </a:p>
+        </p:txBody>
+      </p:sp>
+      <p:sp>
+        <p:nvSpPr>
+          <p:cNvPr id="15" name="TextBox 14"/>
+          <p:cNvSpPr txBox="1"/>
+          <p:nvPr/>
+        </p:nvSpPr>
+        <p:spPr>
+          <a:xfrm>
+            <a:off x="8227314" y="3236976"/>
+            <a:ext cx="3017520" cy="914400"/>
+          </a:xfrm>
+          <a:prstGeom prst="rect">
+            <a:avLst/>
+          </a:prstGeom>
+          <a:noFill/>
+        </p:spPr>
+        <p:txBody>
+          <a:bodyPr wrap="square" lIns="45720" rIns="45720" tIns="18288" bIns="18288">
+            <a:spAutoFit/>
+          </a:bodyPr>
+          <a:lstStyle/>
+          <a:p>
+            <a:pPr algn="ctr">
+              <a:defRPr sz="1500" b="0">
+                <a:solidFill>
+                  <a:srgbClr val="6B6B6B"/>
+                </a:solidFill>
+                <a:latin typeface="Calibri"/>
+              </a:defRPr>
+            </a:pPr>
+            <a:r>
+              <a:t>Propose + critique</a:t>
+            </a:r>
+            <a:br/>
+            <a:r>
+              <a:t>Décisions robustes</a:t>
+            </a:r>
+          </a:p>
+        </p:txBody>
+      </p:sp>
+      <p:sp>
+        <p:nvSpPr>
+          <p:cNvPr id="16" name="Rectangle 15"/>
+          <p:cNvSpPr/>
+          <p:nvPr/>
+        </p:nvSpPr>
+        <p:spPr>
+          <a:xfrm>
+            <a:off x="2423160" y="4681728"/>
+            <a:ext cx="7342631" cy="1078992"/>
+          </a:xfrm>
+          <a:prstGeom prst="rect">
+            <a:avLst/>
+          </a:prstGeom>
+          <a:solidFill>
+            <a:srgbClr val="FFFFFF"/>
+          </a:solidFill>
+          <a:ln>
+            <a:solidFill>
+              <a:srgbClr val="CCE0D2"/>
+            </a:solidFill>
+          </a:ln>
+          <a:effectLst/>
+        </p:spPr>
+        <p:style>
+          <a:lnRef idx="1">
+            <a:schemeClr val="accent1"/>
+          </a:lnRef>
+          <a:fillRef idx="3">
+            <a:schemeClr val="accent1"/>
+          </a:fillRef>
+          <a:effectRef idx="2">
+            <a:schemeClr val="accent1"/>
+          </a:effectRef>
+          <a:fontRef idx="minor">
+            <a:schemeClr val="lt1"/>
+          </a:fontRef>
+        </p:style>
+        <p:txBody>
+          <a:bodyPr rtlCol="0" anchor="ctr"/>
+          <a:lstStyle/>
+          <a:p>
+            <a:pPr algn="ctr"/>
+          </a:p>
+        </p:txBody>
+      </p:sp>
+      <p:sp>
+        <p:nvSpPr>
+          <p:cNvPr id="17" name="Rectangle 16"/>
+          <p:cNvSpPr/>
+          <p:nvPr/>
+        </p:nvSpPr>
+        <p:spPr>
+          <a:xfrm>
+            <a:off x="2423160" y="4681728"/>
+            <a:ext cx="64008" cy="1078992"/>
+          </a:xfrm>
+          <a:prstGeom prst="rect">
+            <a:avLst/>
+          </a:prstGeom>
+          <a:solidFill>
+            <a:srgbClr val="00874E"/>
+          </a:solidFill>
+          <a:ln>
+            <a:noFill/>
+          </a:ln>
+          <a:effectLst/>
+        </p:spPr>
+        <p:style>
+          <a:lnRef idx="1">
+            <a:schemeClr val="accent1"/>
+          </a:lnRef>
+          <a:fillRef idx="3">
+            <a:schemeClr val="accent1"/>
+          </a:fillRef>
+          <a:effectRef idx="2">
+            <a:schemeClr val="accent1"/>
+          </a:effectRef>
+          <a:fontRef idx="minor">
+            <a:schemeClr val="lt1"/>
+          </a:fontRef>
+        </p:style>
+        <p:txBody>
+          <a:bodyPr rtlCol="0" anchor="ctr"/>
+          <a:lstStyle/>
+          <a:p>
+            <a:pPr algn="ctr"/>
+          </a:p>
+        </p:txBody>
+      </p:sp>
+      <p:sp>
+        <p:nvSpPr>
+          <p:cNvPr id="18" name="TextBox 17"/>
+          <p:cNvSpPr txBox="1"/>
+          <p:nvPr/>
+        </p:nvSpPr>
+        <p:spPr>
+          <a:xfrm>
+            <a:off x="2587752" y="4937760"/>
+            <a:ext cx="7013447" cy="713231"/>
+          </a:xfrm>
+          <a:prstGeom prst="rect">
+            <a:avLst/>
+          </a:prstGeom>
+          <a:noFill/>
+        </p:spPr>
+        <p:txBody>
+          <a:bodyPr wrap="square" lIns="45720" rIns="45720" tIns="18288" bIns="18288">
+            <a:spAutoFit/>
+          </a:bodyPr>
+          <a:lstStyle/>
+          <a:p>
+            <a:pPr algn="ctr">
+              <a:defRPr sz="1500" b="1">
+                <a:solidFill>
+                  <a:srgbClr val="006B3F"/>
+                </a:solidFill>
+                <a:latin typeface="Calibri"/>
+              </a:defRPr>
+            </a:pPr>
+            <a:r>
+              <a:t>Défi: Essayez «Analyse étape par étape... puis challenge ta réponse» cette semaine!</a:t>
+            </a:r>
+          </a:p>
+        </p:txBody>
+      </p:sp>
+      <p:sp>
+        <p:nvSpPr>
+          <p:cNvPr id="19" name="TextBox 18"/>
+          <p:cNvSpPr txBox="1"/>
+          <p:nvPr/>
+        </p:nvSpPr>
+        <p:spPr>
+          <a:xfrm>
+            <a:off x="914400" y="5989320"/>
+            <a:ext cx="10360152" cy="365760"/>
+          </a:xfrm>
+          <a:prstGeom prst="rect">
+            <a:avLst/>
+          </a:prstGeom>
+          <a:noFill/>
+        </p:spPr>
+        <p:txBody>
+          <a:bodyPr wrap="square" lIns="45720" rIns="45720" tIns="18288" bIns="18288">
+            <a:spAutoFit/>
+          </a:bodyPr>
+          <a:lstStyle/>
+          <a:p>
+            <a:pPr algn="ctr">
+              <a:defRPr sz="1300" b="0">
+                <a:solidFill>
+                  <a:srgbClr val="CCE0D2"/>
+                </a:solidFill>
+                <a:latin typeface="Calibri"/>
+              </a:defRPr>
+            </a:pPr>
+            <a:r>
+              <a:t>La minute Copilot — À la semaine prochaine!</a:t>
             </a:r>
           </a:p>
         </p:txBody>
